--- a/output/wordlabs-respect-3day.pptx
+++ b/output/wordlabs-respect-3day.pptx
@@ -5622,7 +5622,7 @@
                 <a:ea typeface="Trebuchet MS" pitchFamily="34" charset="-122"/>
                 <a:cs typeface="Trebuchet MS" pitchFamily="34" charset="-120"/>
               </a:rPr>
-              <a:t>0</a:t>
+              <a:t>1</a:t>
             </a:r>
             <a:pPr algn="ctr" indent="0" marL="0">
               <a:buNone/>
@@ -6040,7 +6040,7 @@
                 <a:ea typeface="Calibri" pitchFamily="34" charset="-122"/>
                 <a:cs typeface="Calibri" pitchFamily="34" charset="-120"/>
               </a:rPr>
-              <a:t>A </a:t>
+              <a:t>Being </a:t>
             </a:r>
             <a:pPr algn="l" indent="0" marL="0">
               <a:buNone/>
@@ -6071,38 +6071,7 @@
                 <a:ea typeface="Calibri" pitchFamily="34" charset="-122"/>
                 <a:cs typeface="Calibri" pitchFamily="34" charset="-120"/>
               </a:rPr>
-              <a:t> person will never show </a:t>
-            </a:r>
-            <a:pPr algn="l" indent="0" marL="0">
-              <a:buNone/>
-            </a:pPr>
-            <a:r>
-              <a:rPr lang="en-US" sz="1800" b="1" dirty="0">
-                <a:solidFill>
-                  <a:srgbClr val="0D9488"/>
-                </a:solidFill>
-                <a:highlight>
-                  <a:srgbClr val="CCFBF1"/>
-                </a:highlight>
-                <a:latin typeface="Calibri" pitchFamily="34" charset="0"/>
-                <a:ea typeface="Calibri" pitchFamily="34" charset="-122"/>
-                <a:cs typeface="Calibri" pitchFamily="34" charset="-120"/>
-              </a:rPr>
-              <a:t>disrespect</a:t>
-            </a:r>
-            <a:pPr algn="l" indent="0" marL="0">
-              <a:buNone/>
-            </a:pPr>
-            <a:r>
-              <a:rPr lang="en-US" sz="1800" dirty="0">
-                <a:solidFill>
-                  <a:srgbClr val="0F172A"/>
-                </a:solidFill>
-                <a:latin typeface="Calibri" pitchFamily="34" charset="0"/>
-                <a:ea typeface="Calibri" pitchFamily="34" charset="-122"/>
-                <a:cs typeface="Calibri" pitchFamily="34" charset="-120"/>
-              </a:rPr>
-              <a:t> to someone who is trying their best.</a:t>
+              <a:t> to others is important, even when you disagree with them.</a:t>
             </a:r>
             <a:endParaRPr lang="en-US" sz="1800" dirty="0"/>
           </a:p>
@@ -7860,7 +7829,7 @@
                 <a:ea typeface="Calibri" pitchFamily="34" charset="-122"/>
                 <a:cs typeface="Calibri" pitchFamily="34" charset="-120"/>
               </a:rPr>
-              <a:t>to look back at, regard</a:t>
+              <a:t>to regard, look back at</a:t>
             </a:r>
             <a:endParaRPr lang="en-US" sz="850" dirty="0"/>
           </a:p>
@@ -7972,7 +7941,7 @@
                 <a:ea typeface="Calibri" pitchFamily="34" charset="-122"/>
                 <a:cs typeface="Calibri" pitchFamily="34" charset="-120"/>
               </a:rPr>
-              <a:t>full of</a:t>
+              <a:t>full of, having</a:t>
             </a:r>
             <a:endParaRPr lang="en-US" sz="850" dirty="0"/>
           </a:p>
@@ -8845,7 +8814,7 @@
                 <a:ea typeface="Calibri" pitchFamily="34" charset="-122"/>
                 <a:cs typeface="Calibri" pitchFamily="34" charset="-120"/>
               </a:rPr>
-              <a:t>to look back at, regard</a:t>
+              <a:t>to regard, look back at</a:t>
             </a:r>
             <a:endParaRPr lang="en-US" sz="850" dirty="0"/>
           </a:p>
@@ -8957,7 +8926,7 @@
                 <a:ea typeface="Calibri" pitchFamily="34" charset="-122"/>
                 <a:cs typeface="Calibri" pitchFamily="34" charset="-120"/>
               </a:rPr>
-              <a:t>full of</a:t>
+              <a:t>full of, having</a:t>
             </a:r>
             <a:endParaRPr lang="en-US" sz="850" dirty="0"/>
           </a:p>
@@ -10067,7 +10036,7 @@
                 <a:ea typeface="Calibri" pitchFamily="34" charset="-122"/>
                 <a:cs typeface="Calibri" pitchFamily="34" charset="-120"/>
               </a:rPr>
-              <a:t>to look back at, regard</a:t>
+              <a:t>to regard, look back at</a:t>
             </a:r>
             <a:endParaRPr lang="en-US" sz="850" dirty="0"/>
           </a:p>
@@ -10179,7 +10148,7 @@
                 <a:ea typeface="Calibri" pitchFamily="34" charset="-122"/>
                 <a:cs typeface="Calibri" pitchFamily="34" charset="-120"/>
               </a:rPr>
-              <a:t>full of</a:t>
+              <a:t>full of, having</a:t>
             </a:r>
             <a:endParaRPr lang="en-US" sz="850" dirty="0"/>
           </a:p>
@@ -12888,7 +12857,7 @@
                 <a:ea typeface="Calibri" pitchFamily="34" charset="-122"/>
                 <a:cs typeface="Calibri" pitchFamily="34" charset="-120"/>
               </a:rPr>
-              <a:t>to look back at, regard</a:t>
+              <a:t>to regard, look back at</a:t>
             </a:r>
             <a:endParaRPr lang="en-US" sz="850" dirty="0"/>
           </a:p>
@@ -13873,7 +13842,7 @@
                 <a:ea typeface="Calibri" pitchFamily="34" charset="-122"/>
                 <a:cs typeface="Calibri" pitchFamily="34" charset="-120"/>
               </a:rPr>
-              <a:t>to look back at, regard</a:t>
+              <a:t>to regard, look back at</a:t>
             </a:r>
             <a:endParaRPr lang="en-US" sz="850" dirty="0"/>
           </a:p>
@@ -15360,7 +15329,7 @@
                 <a:ea typeface="Calibri" pitchFamily="34" charset="-122"/>
                 <a:cs typeface="Calibri" pitchFamily="34" charset="-120"/>
               </a:rPr>
-              <a:t>to look back at, regard</a:t>
+              <a:t>to regard, look back at</a:t>
             </a:r>
             <a:endParaRPr lang="en-US" sz="850" dirty="0"/>
           </a:p>
@@ -17429,7 +17398,7 @@
                 <a:ea typeface="Trebuchet MS" pitchFamily="34" charset="-122"/>
                 <a:cs typeface="Trebuchet MS" pitchFamily="34" charset="-120"/>
               </a:rPr>
-              <a:t>1</a:t>
+              <a:t>2</a:t>
             </a:r>
             <a:pPr algn="ctr" indent="0" marL="0">
               <a:buNone/>
@@ -17443,7 +17412,7 @@
                 <a:ea typeface="Trebuchet MS" pitchFamily="34" charset="-122"/>
                 <a:cs typeface="Trebuchet MS" pitchFamily="34" charset="-120"/>
               </a:rPr>
-              <a:t>  punctuation mark</a:t>
+              <a:t>  punctuation marks</a:t>
             </a:r>
             <a:endParaRPr lang="en-US" sz="2800" dirty="0"/>
           </a:p>
@@ -17847,7 +17816,7 @@
                 <a:ea typeface="Calibri" pitchFamily="34" charset="-122"/>
                 <a:cs typeface="Calibri" pitchFamily="34" charset="-120"/>
               </a:rPr>
-              <a:t>Although she was </a:t>
+              <a:t>She </a:t>
             </a:r>
             <a:pPr algn="l" indent="0" marL="0">
               <a:buNone/>
@@ -17864,7 +17833,7 @@
                 <a:ea typeface="Calibri" pitchFamily="34" charset="-122"/>
                 <a:cs typeface="Calibri" pitchFamily="34" charset="-120"/>
               </a:rPr>
-              <a:t>disrespectful</a:t>
+              <a:t>respectfully</a:t>
             </a:r>
             <a:pPr algn="l" indent="0" marL="0">
               <a:buNone/>
@@ -17878,7 +17847,7 @@
                 <a:ea typeface="Calibri" pitchFamily="34" charset="-122"/>
                 <a:cs typeface="Calibri" pitchFamily="34" charset="-120"/>
               </a:rPr>
-              <a:t> at first, she learned to be </a:t>
+              <a:t> disagreed; her </a:t>
             </a:r>
             <a:pPr algn="l" indent="0" marL="0">
               <a:buNone/>
@@ -17895,7 +17864,7 @@
                 <a:ea typeface="Calibri" pitchFamily="34" charset="-122"/>
                 <a:cs typeface="Calibri" pitchFamily="34" charset="-120"/>
               </a:rPr>
-              <a:t>respectful</a:t>
+              <a:t>respectable</a:t>
             </a:r>
             <a:pPr algn="l" indent="0" marL="0">
               <a:buNone/>
@@ -17909,7 +17878,7 @@
                 <a:ea typeface="Calibri" pitchFamily="34" charset="-122"/>
                 <a:cs typeface="Calibri" pitchFamily="34" charset="-120"/>
               </a:rPr>
-              <a:t> and earned everyone's </a:t>
+              <a:t> manner meant everyone listened, </a:t>
             </a:r>
             <a:pPr algn="l" indent="0" marL="0">
               <a:buNone/>
@@ -17926,7 +17895,7 @@
                 <a:ea typeface="Calibri" pitchFamily="34" charset="-122"/>
                 <a:cs typeface="Calibri" pitchFamily="34" charset="-120"/>
               </a:rPr>
-              <a:t>respect</a:t>
+              <a:t>irrespective</a:t>
             </a:r>
             <a:pPr algn="l" indent="0" marL="0">
               <a:buNone/>
@@ -17940,7 +17909,7 @@
                 <a:ea typeface="Calibri" pitchFamily="34" charset="-122"/>
                 <a:cs typeface="Calibri" pitchFamily="34" charset="-120"/>
               </a:rPr>
-              <a:t>.</a:t>
+              <a:t> of their own views.</a:t>
             </a:r>
             <a:endParaRPr lang="en-US" sz="1800" dirty="0"/>
           </a:p>
@@ -18095,7 +18064,7 @@
                 <a:ea typeface="Trebuchet MS" pitchFamily="34" charset="-122"/>
                 <a:cs typeface="Trebuchet MS" pitchFamily="34" charset="-120"/>
               </a:rPr>
-              <a:t>disrespectful</a:t>
+              <a:t>respectfully</a:t>
             </a:r>
             <a:endParaRPr lang="en-US" sz="1400" dirty="0"/>
           </a:p>
@@ -18223,7 +18192,7 @@
                 <a:ea typeface="Trebuchet MS" pitchFamily="34" charset="-122"/>
                 <a:cs typeface="Trebuchet MS" pitchFamily="34" charset="-120"/>
               </a:rPr>
-              <a:t>respectful</a:t>
+              <a:t>respectable</a:t>
             </a:r>
             <a:endParaRPr lang="en-US" sz="1400" dirty="0"/>
           </a:p>
@@ -18351,7 +18320,7 @@
                 <a:ea typeface="Trebuchet MS" pitchFamily="34" charset="-122"/>
                 <a:cs typeface="Trebuchet MS" pitchFamily="34" charset="-120"/>
               </a:rPr>
-              <a:t>respect</a:t>
+              <a:t>irrespective</a:t>
             </a:r>
             <a:endParaRPr lang="en-US" sz="1400" dirty="0"/>
           </a:p>
@@ -18821,7 +18790,7 @@
                 <a:ea typeface="Trebuchet MS" pitchFamily="34" charset="-122"/>
                 <a:cs typeface="Trebuchet MS" pitchFamily="34" charset="-120"/>
               </a:rPr>
-              <a:t>disrespectful</a:t>
+              <a:t>respectfully</a:t>
             </a:r>
             <a:endParaRPr lang="en-US" sz="2800" dirty="0"/>
           </a:p>
@@ -19648,7 +19617,7 @@
                 <a:ea typeface="Trebuchet MS" pitchFamily="34" charset="-122"/>
                 <a:cs typeface="Trebuchet MS" pitchFamily="34" charset="-120"/>
               </a:rPr>
-              <a:t>disrespectful</a:t>
+              <a:t>respectfully</a:t>
             </a:r>
             <a:endParaRPr lang="en-US" sz="2800" dirty="0"/>
           </a:p>
@@ -19737,11 +19706,11 @@
             </a:avLst>
           </a:prstGeom>
           <a:solidFill>
-            <a:srgbClr val="DDD6FE"/>
+            <a:srgbClr val="CCFBF1"/>
           </a:solidFill>
           <a:ln w="19050">
             <a:solidFill>
-              <a:srgbClr val="7C3AED"/>
+              <a:srgbClr val="0D9488"/>
             </a:solidFill>
             <a:prstDash val="solid"/>
           </a:ln>
@@ -19781,13 +19750,13 @@
             <a:r>
               <a:rPr lang="en-US" sz="1300" b="1" dirty="0">
                 <a:solidFill>
-                  <a:srgbClr val="4C1D95"/>
+                  <a:srgbClr val="0F766E"/>
                 </a:solidFill>
                 <a:latin typeface="Trebuchet MS" pitchFamily="34" charset="0"/>
                 <a:ea typeface="Trebuchet MS" pitchFamily="34" charset="-122"/>
                 <a:cs typeface="Trebuchet MS" pitchFamily="34" charset="-120"/>
               </a:rPr>
-              <a:t>dis</a:t>
+              <a:t>respect</a:t>
             </a:r>
             <a:endParaRPr lang="en-US" sz="1300" dirty="0"/>
           </a:p>
@@ -19826,7 +19795,7 @@
                 <a:ea typeface="Calibri" pitchFamily="34" charset="-122"/>
                 <a:cs typeface="Calibri" pitchFamily="34" charset="-120"/>
               </a:rPr>
-              <a:t>not, opposite of</a:t>
+              <a:t>to regard, look back at</a:t>
             </a:r>
             <a:endParaRPr lang="en-US" sz="850" dirty="0"/>
           </a:p>
@@ -19849,11 +19818,11 @@
             </a:avLst>
           </a:prstGeom>
           <a:solidFill>
-            <a:srgbClr val="CCFBF1"/>
+            <a:srgbClr val="FCE7F3"/>
           </a:solidFill>
           <a:ln w="19050">
             <a:solidFill>
-              <a:srgbClr val="0D9488"/>
+              <a:srgbClr val="DB2777"/>
             </a:solidFill>
             <a:prstDash val="solid"/>
           </a:ln>
@@ -19893,13 +19862,13 @@
             <a:r>
               <a:rPr lang="en-US" sz="1300" b="1" dirty="0">
                 <a:solidFill>
-                  <a:srgbClr val="0F766E"/>
+                  <a:srgbClr val="9D174D"/>
                 </a:solidFill>
                 <a:latin typeface="Trebuchet MS" pitchFamily="34" charset="0"/>
                 <a:ea typeface="Trebuchet MS" pitchFamily="34" charset="-122"/>
                 <a:cs typeface="Trebuchet MS" pitchFamily="34" charset="-120"/>
               </a:rPr>
-              <a:t>respect</a:t>
+              <a:t>ful</a:t>
             </a:r>
             <a:endParaRPr lang="en-US" sz="1300" dirty="0"/>
           </a:p>
@@ -19938,7 +19907,7 @@
                 <a:ea typeface="Calibri" pitchFamily="34" charset="-122"/>
                 <a:cs typeface="Calibri" pitchFamily="34" charset="-120"/>
               </a:rPr>
-              <a:t>to look back at, regard</a:t>
+              <a:t>full of, having</a:t>
             </a:r>
             <a:endParaRPr lang="en-US" sz="850" dirty="0"/>
           </a:p>
@@ -20011,7 +19980,7 @@
                 <a:ea typeface="Trebuchet MS" pitchFamily="34" charset="-122"/>
                 <a:cs typeface="Trebuchet MS" pitchFamily="34" charset="-120"/>
               </a:rPr>
-              <a:t>ful</a:t>
+              <a:t>ly</a:t>
             </a:r>
             <a:endParaRPr lang="en-US" sz="1300" dirty="0"/>
           </a:p>
@@ -20050,7 +20019,7 @@
                 <a:ea typeface="Calibri" pitchFamily="34" charset="-122"/>
                 <a:cs typeface="Calibri" pitchFamily="34" charset="-120"/>
               </a:rPr>
-              <a:t>full of</a:t>
+              <a:t>in a way that is</a:t>
             </a:r>
             <a:endParaRPr lang="en-US" sz="850" dirty="0"/>
           </a:p>
@@ -20745,7 +20714,7 @@
                 <a:ea typeface="Trebuchet MS" pitchFamily="34" charset="-122"/>
                 <a:cs typeface="Trebuchet MS" pitchFamily="34" charset="-120"/>
               </a:rPr>
-              <a:t>disrespectful</a:t>
+              <a:t>respectfully</a:t>
             </a:r>
             <a:endParaRPr lang="en-US" sz="2800" dirty="0"/>
           </a:p>
@@ -20834,11 +20803,11 @@
             </a:avLst>
           </a:prstGeom>
           <a:solidFill>
-            <a:srgbClr val="DDD6FE"/>
+            <a:srgbClr val="CCFBF1"/>
           </a:solidFill>
           <a:ln w="19050">
             <a:solidFill>
-              <a:srgbClr val="7C3AED"/>
+              <a:srgbClr val="0D9488"/>
             </a:solidFill>
             <a:prstDash val="solid"/>
           </a:ln>
@@ -20878,13 +20847,13 @@
             <a:r>
               <a:rPr lang="en-US" sz="1300" b="1" dirty="0">
                 <a:solidFill>
-                  <a:srgbClr val="4C1D95"/>
+                  <a:srgbClr val="0F766E"/>
                 </a:solidFill>
                 <a:latin typeface="Trebuchet MS" pitchFamily="34" charset="0"/>
                 <a:ea typeface="Trebuchet MS" pitchFamily="34" charset="-122"/>
                 <a:cs typeface="Trebuchet MS" pitchFamily="34" charset="-120"/>
               </a:rPr>
-              <a:t>dis</a:t>
+              <a:t>respect</a:t>
             </a:r>
             <a:endParaRPr lang="en-US" sz="1300" dirty="0"/>
           </a:p>
@@ -20923,7 +20892,7 @@
                 <a:ea typeface="Calibri" pitchFamily="34" charset="-122"/>
                 <a:cs typeface="Calibri" pitchFamily="34" charset="-120"/>
               </a:rPr>
-              <a:t>not, opposite of</a:t>
+              <a:t>to regard, look back at</a:t>
             </a:r>
             <a:endParaRPr lang="en-US" sz="850" dirty="0"/>
           </a:p>
@@ -20946,11 +20915,11 @@
             </a:avLst>
           </a:prstGeom>
           <a:solidFill>
-            <a:srgbClr val="CCFBF1"/>
+            <a:srgbClr val="FCE7F3"/>
           </a:solidFill>
           <a:ln w="19050">
             <a:solidFill>
-              <a:srgbClr val="0D9488"/>
+              <a:srgbClr val="DB2777"/>
             </a:solidFill>
             <a:prstDash val="solid"/>
           </a:ln>
@@ -20990,13 +20959,13 @@
             <a:r>
               <a:rPr lang="en-US" sz="1300" b="1" dirty="0">
                 <a:solidFill>
-                  <a:srgbClr val="0F766E"/>
+                  <a:srgbClr val="9D174D"/>
                 </a:solidFill>
                 <a:latin typeface="Trebuchet MS" pitchFamily="34" charset="0"/>
                 <a:ea typeface="Trebuchet MS" pitchFamily="34" charset="-122"/>
                 <a:cs typeface="Trebuchet MS" pitchFamily="34" charset="-120"/>
               </a:rPr>
-              <a:t>respect</a:t>
+              <a:t>ful</a:t>
             </a:r>
             <a:endParaRPr lang="en-US" sz="1300" dirty="0"/>
           </a:p>
@@ -21035,7 +21004,7 @@
                 <a:ea typeface="Calibri" pitchFamily="34" charset="-122"/>
                 <a:cs typeface="Calibri" pitchFamily="34" charset="-120"/>
               </a:rPr>
-              <a:t>to look back at, regard</a:t>
+              <a:t>full of, having</a:t>
             </a:r>
             <a:endParaRPr lang="en-US" sz="850" dirty="0"/>
           </a:p>
@@ -21108,7 +21077,7 @@
                 <a:ea typeface="Trebuchet MS" pitchFamily="34" charset="-122"/>
                 <a:cs typeface="Trebuchet MS" pitchFamily="34" charset="-120"/>
               </a:rPr>
-              <a:t>ful</a:t>
+              <a:t>ly</a:t>
             </a:r>
             <a:endParaRPr lang="en-US" sz="1300" dirty="0"/>
           </a:p>
@@ -21147,7 +21116,7 @@
                 <a:ea typeface="Calibri" pitchFamily="34" charset="-122"/>
                 <a:cs typeface="Calibri" pitchFamily="34" charset="-120"/>
               </a:rPr>
-              <a:t>full of</a:t>
+              <a:t>in a way that is</a:t>
             </a:r>
             <a:endParaRPr lang="en-US" sz="850" dirty="0"/>
           </a:p>
@@ -21306,7 +21275,7 @@
                 <a:ea typeface="Trebuchet MS" pitchFamily="34" charset="-122"/>
                 <a:cs typeface="Trebuchet MS" pitchFamily="34" charset="-120"/>
               </a:rPr>
-              <a:t>dis</a:t>
+              <a:t>re</a:t>
             </a:r>
             <a:endParaRPr lang="en-US" sz="1400" dirty="0"/>
           </a:p>
@@ -21411,7 +21380,7 @@
                 <a:ea typeface="Trebuchet MS" pitchFamily="34" charset="-122"/>
                 <a:cs typeface="Trebuchet MS" pitchFamily="34" charset="-120"/>
               </a:rPr>
-              <a:t>re</a:t>
+              <a:t>spect</a:t>
             </a:r>
             <a:endParaRPr lang="en-US" sz="1400" dirty="0"/>
           </a:p>
@@ -21516,7 +21485,7 @@
                 <a:ea typeface="Trebuchet MS" pitchFamily="34" charset="-122"/>
                 <a:cs typeface="Trebuchet MS" pitchFamily="34" charset="-120"/>
               </a:rPr>
-              <a:t>spect</a:t>
+              <a:t>ful</a:t>
             </a:r>
             <a:endParaRPr lang="en-US" sz="1400" dirty="0"/>
           </a:p>
@@ -21621,7 +21590,7 @@
                 <a:ea typeface="Trebuchet MS" pitchFamily="34" charset="-122"/>
                 <a:cs typeface="Trebuchet MS" pitchFamily="34" charset="-120"/>
               </a:rPr>
-              <a:t>ful</a:t>
+              <a:t>ly</a:t>
             </a:r>
             <a:endParaRPr lang="en-US" sz="1400" dirty="0"/>
           </a:p>
@@ -22184,7 +22153,7 @@
                 <a:ea typeface="Trebuchet MS" pitchFamily="34" charset="-122"/>
                 <a:cs typeface="Trebuchet MS" pitchFamily="34" charset="-120"/>
               </a:rPr>
-              <a:t>disrespectful</a:t>
+              <a:t>respectfully</a:t>
             </a:r>
             <a:endParaRPr lang="en-US" sz="2800" dirty="0"/>
           </a:p>
@@ -22273,11 +22242,11 @@
             </a:avLst>
           </a:prstGeom>
           <a:solidFill>
-            <a:srgbClr val="DDD6FE"/>
+            <a:srgbClr val="CCFBF1"/>
           </a:solidFill>
           <a:ln w="19050">
             <a:solidFill>
-              <a:srgbClr val="7C3AED"/>
+              <a:srgbClr val="0D9488"/>
             </a:solidFill>
             <a:prstDash val="solid"/>
           </a:ln>
@@ -22317,13 +22286,13 @@
             <a:r>
               <a:rPr lang="en-US" sz="1300" b="1" dirty="0">
                 <a:solidFill>
-                  <a:srgbClr val="4C1D95"/>
+                  <a:srgbClr val="0F766E"/>
                 </a:solidFill>
                 <a:latin typeface="Trebuchet MS" pitchFamily="34" charset="0"/>
                 <a:ea typeface="Trebuchet MS" pitchFamily="34" charset="-122"/>
                 <a:cs typeface="Trebuchet MS" pitchFamily="34" charset="-120"/>
               </a:rPr>
-              <a:t>dis</a:t>
+              <a:t>respect</a:t>
             </a:r>
             <a:endParaRPr lang="en-US" sz="1300" dirty="0"/>
           </a:p>
@@ -22362,7 +22331,7 @@
                 <a:ea typeface="Calibri" pitchFamily="34" charset="-122"/>
                 <a:cs typeface="Calibri" pitchFamily="34" charset="-120"/>
               </a:rPr>
-              <a:t>not, opposite of</a:t>
+              <a:t>to regard, look back at</a:t>
             </a:r>
             <a:endParaRPr lang="en-US" sz="850" dirty="0"/>
           </a:p>
@@ -22385,11 +22354,11 @@
             </a:avLst>
           </a:prstGeom>
           <a:solidFill>
-            <a:srgbClr val="CCFBF1"/>
+            <a:srgbClr val="FCE7F3"/>
           </a:solidFill>
           <a:ln w="19050">
             <a:solidFill>
-              <a:srgbClr val="0D9488"/>
+              <a:srgbClr val="DB2777"/>
             </a:solidFill>
             <a:prstDash val="solid"/>
           </a:ln>
@@ -22429,13 +22398,13 @@
             <a:r>
               <a:rPr lang="en-US" sz="1300" b="1" dirty="0">
                 <a:solidFill>
-                  <a:srgbClr val="0F766E"/>
+                  <a:srgbClr val="9D174D"/>
                 </a:solidFill>
                 <a:latin typeface="Trebuchet MS" pitchFamily="34" charset="0"/>
                 <a:ea typeface="Trebuchet MS" pitchFamily="34" charset="-122"/>
                 <a:cs typeface="Trebuchet MS" pitchFamily="34" charset="-120"/>
               </a:rPr>
-              <a:t>respect</a:t>
+              <a:t>ful</a:t>
             </a:r>
             <a:endParaRPr lang="en-US" sz="1300" dirty="0"/>
           </a:p>
@@ -22474,7 +22443,7 @@
                 <a:ea typeface="Calibri" pitchFamily="34" charset="-122"/>
                 <a:cs typeface="Calibri" pitchFamily="34" charset="-120"/>
               </a:rPr>
-              <a:t>to look back at, regard</a:t>
+              <a:t>full of, having</a:t>
             </a:r>
             <a:endParaRPr lang="en-US" sz="850" dirty="0"/>
           </a:p>
@@ -22547,7 +22516,7 @@
                 <a:ea typeface="Trebuchet MS" pitchFamily="34" charset="-122"/>
                 <a:cs typeface="Trebuchet MS" pitchFamily="34" charset="-120"/>
               </a:rPr>
-              <a:t>ful</a:t>
+              <a:t>ly</a:t>
             </a:r>
             <a:endParaRPr lang="en-US" sz="1300" dirty="0"/>
           </a:p>
@@ -22586,7 +22555,7 @@
                 <a:ea typeface="Calibri" pitchFamily="34" charset="-122"/>
                 <a:cs typeface="Calibri" pitchFamily="34" charset="-120"/>
               </a:rPr>
-              <a:t>full of</a:t>
+              <a:t>in a way that is</a:t>
             </a:r>
             <a:endParaRPr lang="en-US" sz="850" dirty="0"/>
           </a:p>
@@ -22745,7 +22714,7 @@
                 <a:ea typeface="Trebuchet MS" pitchFamily="34" charset="-122"/>
                 <a:cs typeface="Trebuchet MS" pitchFamily="34" charset="-120"/>
               </a:rPr>
-              <a:t>dis</a:t>
+              <a:t>re</a:t>
             </a:r>
             <a:endParaRPr lang="en-US" sz="1400" dirty="0"/>
           </a:p>
@@ -22850,7 +22819,7 @@
                 <a:ea typeface="Trebuchet MS" pitchFamily="34" charset="-122"/>
                 <a:cs typeface="Trebuchet MS" pitchFamily="34" charset="-120"/>
               </a:rPr>
-              <a:t>re</a:t>
+              <a:t>spect</a:t>
             </a:r>
             <a:endParaRPr lang="en-US" sz="1400" dirty="0"/>
           </a:p>
@@ -22955,7 +22924,7 @@
                 <a:ea typeface="Trebuchet MS" pitchFamily="34" charset="-122"/>
                 <a:cs typeface="Trebuchet MS" pitchFamily="34" charset="-120"/>
               </a:rPr>
-              <a:t>spect</a:t>
+              <a:t>ful</a:t>
             </a:r>
             <a:endParaRPr lang="en-US" sz="1400" dirty="0"/>
           </a:p>
@@ -23060,7 +23029,7 @@
                 <a:ea typeface="Trebuchet MS" pitchFamily="34" charset="-122"/>
                 <a:cs typeface="Trebuchet MS" pitchFamily="34" charset="-120"/>
               </a:rPr>
-              <a:t>ful</a:t>
+              <a:t>ly</a:t>
             </a:r>
             <a:endParaRPr lang="en-US" sz="1400" dirty="0"/>
           </a:p>
@@ -23167,8 +23136,8 @@
         </p:nvSpPr>
         <p:spPr>
           <a:xfrm>
-            <a:off x="1952897" y="4169664"/>
-            <a:ext cx="451573" cy="384048"/>
+            <a:off x="1952244" y="4169664"/>
+            <a:ext cx="543652" cy="384048"/>
           </a:xfrm>
           <a:prstGeom prst="rect">
             <a:avLst>
@@ -23194,8 +23163,8 @@
         </p:nvSpPr>
         <p:spPr>
           <a:xfrm>
-            <a:off x="1952897" y="4169664"/>
-            <a:ext cx="451573" cy="384048"/>
+            <a:off x="1952244" y="4169664"/>
+            <a:ext cx="543652" cy="384048"/>
           </a:xfrm>
           <a:prstGeom prst="rect">
             <a:avLst/>
@@ -23219,7 +23188,7 @@
                 <a:ea typeface="Trebuchet MS" pitchFamily="34" charset="-122"/>
                 <a:cs typeface="Trebuchet MS" pitchFamily="34" charset="-120"/>
               </a:rPr>
-              <a:t>d</a:t>
+              <a:t>r</a:t>
             </a:r>
             <a:endParaRPr lang="en-US" sz="900" dirty="0"/>
           </a:p>
@@ -23233,8 +23202,8 @@
         </p:nvSpPr>
         <p:spPr>
           <a:xfrm>
-            <a:off x="2455415" y="4169664"/>
-            <a:ext cx="451573" cy="384048"/>
+            <a:off x="2546188" y="4169664"/>
+            <a:ext cx="543652" cy="384048"/>
           </a:xfrm>
           <a:prstGeom prst="rect">
             <a:avLst>
@@ -23260,8 +23229,8 @@
         </p:nvSpPr>
         <p:spPr>
           <a:xfrm>
-            <a:off x="2455415" y="4169664"/>
-            <a:ext cx="451573" cy="384048"/>
+            <a:off x="2546188" y="4169664"/>
+            <a:ext cx="543652" cy="384048"/>
           </a:xfrm>
           <a:prstGeom prst="rect">
             <a:avLst/>
@@ -23285,7 +23254,7 @@
                 <a:ea typeface="Trebuchet MS" pitchFamily="34" charset="-122"/>
                 <a:cs typeface="Trebuchet MS" pitchFamily="34" charset="-120"/>
               </a:rPr>
-              <a:t>i</a:t>
+              <a:t>e</a:t>
             </a:r>
             <a:endParaRPr lang="en-US" sz="900" dirty="0"/>
           </a:p>
@@ -23299,8 +23268,8 @@
         </p:nvSpPr>
         <p:spPr>
           <a:xfrm>
-            <a:off x="2957933" y="4169664"/>
-            <a:ext cx="451573" cy="384048"/>
+            <a:off x="3140133" y="4169664"/>
+            <a:ext cx="543652" cy="384048"/>
           </a:xfrm>
           <a:prstGeom prst="rect">
             <a:avLst>
@@ -23326,8 +23295,8 @@
         </p:nvSpPr>
         <p:spPr>
           <a:xfrm>
-            <a:off x="2957933" y="4169664"/>
-            <a:ext cx="451573" cy="384048"/>
+            <a:off x="3140133" y="4169664"/>
+            <a:ext cx="543652" cy="384048"/>
           </a:xfrm>
           <a:prstGeom prst="rect">
             <a:avLst/>
@@ -23365,8 +23334,8 @@
         </p:nvSpPr>
         <p:spPr>
           <a:xfrm>
-            <a:off x="3460451" y="4169664"/>
-            <a:ext cx="451573" cy="384048"/>
+            <a:off x="3734077" y="4169664"/>
+            <a:ext cx="543652" cy="384048"/>
           </a:xfrm>
           <a:prstGeom prst="rect">
             <a:avLst>
@@ -23392,8 +23361,8 @@
         </p:nvSpPr>
         <p:spPr>
           <a:xfrm>
-            <a:off x="3460451" y="4169664"/>
-            <a:ext cx="451573" cy="384048"/>
+            <a:off x="3734077" y="4169664"/>
+            <a:ext cx="543652" cy="384048"/>
           </a:xfrm>
           <a:prstGeom prst="rect">
             <a:avLst/>
@@ -23417,7 +23386,7 @@
                 <a:ea typeface="Trebuchet MS" pitchFamily="34" charset="-122"/>
                 <a:cs typeface="Trebuchet MS" pitchFamily="34" charset="-120"/>
               </a:rPr>
-              <a:t>r</a:t>
+              <a:t>p</a:t>
             </a:r>
             <a:endParaRPr lang="en-US" sz="900" dirty="0"/>
           </a:p>
@@ -23431,8 +23400,8 @@
         </p:nvSpPr>
         <p:spPr>
           <a:xfrm>
-            <a:off x="3962969" y="4169664"/>
-            <a:ext cx="451573" cy="384048"/>
+            <a:off x="4328021" y="4169664"/>
+            <a:ext cx="543652" cy="384048"/>
           </a:xfrm>
           <a:prstGeom prst="rect">
             <a:avLst>
@@ -23458,8 +23427,8 @@
         </p:nvSpPr>
         <p:spPr>
           <a:xfrm>
-            <a:off x="3962969" y="4169664"/>
-            <a:ext cx="451573" cy="384048"/>
+            <a:off x="4328021" y="4169664"/>
+            <a:ext cx="543652" cy="384048"/>
           </a:xfrm>
           <a:prstGeom prst="rect">
             <a:avLst/>
@@ -23497,8 +23466,8 @@
         </p:nvSpPr>
         <p:spPr>
           <a:xfrm>
-            <a:off x="4465487" y="4169664"/>
-            <a:ext cx="451573" cy="384048"/>
+            <a:off x="4921966" y="4169664"/>
+            <a:ext cx="543652" cy="384048"/>
           </a:xfrm>
           <a:prstGeom prst="rect">
             <a:avLst>
@@ -23524,8 +23493,8 @@
         </p:nvSpPr>
         <p:spPr>
           <a:xfrm>
-            <a:off x="4465487" y="4169664"/>
-            <a:ext cx="451573" cy="384048"/>
+            <a:off x="4921966" y="4169664"/>
+            <a:ext cx="543652" cy="384048"/>
           </a:xfrm>
           <a:prstGeom prst="rect">
             <a:avLst/>
@@ -23549,7 +23518,7 @@
                 <a:ea typeface="Trebuchet MS" pitchFamily="34" charset="-122"/>
                 <a:cs typeface="Trebuchet MS" pitchFamily="34" charset="-120"/>
               </a:rPr>
-              <a:t>s</a:t>
+              <a:t>c</a:t>
             </a:r>
             <a:endParaRPr lang="en-US" sz="900" dirty="0"/>
           </a:p>
@@ -23557,14 +23526,53 @@
       </p:sp>
       <p:sp>
         <p:nvSpPr>
-          <p:cNvPr id="54" name="Shape 52"/>
-          <p:cNvSpPr/>
-          <p:nvPr/>
-        </p:nvSpPr>
-        <p:spPr>
-          <a:xfrm>
-            <a:off x="4968006" y="4169664"/>
-            <a:ext cx="451573" cy="384048"/>
+          <p:cNvPr id="54" name="Text 52"/>
+          <p:cNvSpPr/>
+          <p:nvPr/>
+        </p:nvSpPr>
+        <p:spPr>
+          <a:xfrm>
+            <a:off x="4921966" y="4572000"/>
+            <a:ext cx="543652" cy="219456"/>
+          </a:xfrm>
+          <a:prstGeom prst="rect">
+            <a:avLst/>
+          </a:prstGeom>
+          <a:noFill/>
+          <a:ln/>
+        </p:spPr>
+        <p:txBody>
+          <a:bodyPr wrap="square" lIns="0" tIns="0" rIns="0" bIns="0" rtlCol="0" anchor="t"/>
+          <a:lstStyle/>
+          <a:p>
+            <a:pPr algn="ctr" indent="0" marL="0">
+              <a:buNone/>
+            </a:pPr>
+            <a:r>
+              <a:rPr lang="en-US" sz="750" i="1" dirty="0">
+                <a:solidFill>
+                  <a:srgbClr val="94A3B8"/>
+                </a:solidFill>
+                <a:latin typeface="Calibri" pitchFamily="34" charset="0"/>
+                <a:ea typeface="Calibri" pitchFamily="34" charset="-122"/>
+                <a:cs typeface="Calibri" pitchFamily="34" charset="-120"/>
+              </a:rPr>
+              <a:t>/k/</a:t>
+            </a:r>
+            <a:endParaRPr lang="en-US" sz="750" dirty="0"/>
+          </a:p>
+        </p:txBody>
+      </p:sp>
+      <p:sp>
+        <p:nvSpPr>
+          <p:cNvPr id="55" name="Shape 53"/>
+          <p:cNvSpPr/>
+          <p:nvPr/>
+        </p:nvSpPr>
+        <p:spPr>
+          <a:xfrm>
+            <a:off x="5515910" y="4169664"/>
+            <a:ext cx="543652" cy="384048"/>
           </a:xfrm>
           <a:prstGeom prst="rect">
             <a:avLst>
@@ -23584,14 +23592,14 @@
       </p:sp>
       <p:sp>
         <p:nvSpPr>
-          <p:cNvPr id="55" name="Text 53"/>
-          <p:cNvSpPr/>
-          <p:nvPr/>
-        </p:nvSpPr>
-        <p:spPr>
-          <a:xfrm>
-            <a:off x="4968006" y="4169664"/>
-            <a:ext cx="451573" cy="384048"/>
+          <p:cNvPr id="56" name="Text 54"/>
+          <p:cNvSpPr/>
+          <p:nvPr/>
+        </p:nvSpPr>
+        <p:spPr>
+          <a:xfrm>
+            <a:off x="5515910" y="4169664"/>
+            <a:ext cx="543652" cy="384048"/>
           </a:xfrm>
           <a:prstGeom prst="rect">
             <a:avLst/>
@@ -23615,7 +23623,7 @@
                 <a:ea typeface="Trebuchet MS" pitchFamily="34" charset="-122"/>
                 <a:cs typeface="Trebuchet MS" pitchFamily="34" charset="-120"/>
               </a:rPr>
-              <a:t>p</a:t>
+              <a:t>t</a:t>
             </a:r>
             <a:endParaRPr lang="en-US" sz="900" dirty="0"/>
           </a:p>
@@ -23623,14 +23631,14 @@
       </p:sp>
       <p:sp>
         <p:nvSpPr>
-          <p:cNvPr id="56" name="Shape 54"/>
-          <p:cNvSpPr/>
-          <p:nvPr/>
-        </p:nvSpPr>
-        <p:spPr>
-          <a:xfrm>
-            <a:off x="5470524" y="4169664"/>
-            <a:ext cx="451573" cy="384048"/>
+          <p:cNvPr id="57" name="Shape 55"/>
+          <p:cNvSpPr/>
+          <p:nvPr/>
+        </p:nvSpPr>
+        <p:spPr>
+          <a:xfrm>
+            <a:off x="6109855" y="4169664"/>
+            <a:ext cx="543652" cy="384048"/>
           </a:xfrm>
           <a:prstGeom prst="rect">
             <a:avLst>
@@ -23650,14 +23658,14 @@
       </p:sp>
       <p:sp>
         <p:nvSpPr>
-          <p:cNvPr id="57" name="Text 55"/>
-          <p:cNvSpPr/>
-          <p:nvPr/>
-        </p:nvSpPr>
-        <p:spPr>
-          <a:xfrm>
-            <a:off x="5470524" y="4169664"/>
-            <a:ext cx="451573" cy="384048"/>
+          <p:cNvPr id="58" name="Text 56"/>
+          <p:cNvSpPr/>
+          <p:nvPr/>
+        </p:nvSpPr>
+        <p:spPr>
+          <a:xfrm>
+            <a:off x="6109855" y="4169664"/>
+            <a:ext cx="543652" cy="384048"/>
           </a:xfrm>
           <a:prstGeom prst="rect">
             <a:avLst/>
@@ -23681,7 +23689,7 @@
                 <a:ea typeface="Trebuchet MS" pitchFamily="34" charset="-122"/>
                 <a:cs typeface="Trebuchet MS" pitchFamily="34" charset="-120"/>
               </a:rPr>
-              <a:t>e</a:t>
+              <a:t>f</a:t>
             </a:r>
             <a:endParaRPr lang="en-US" sz="900" dirty="0"/>
           </a:p>
@@ -23689,14 +23697,14 @@
       </p:sp>
       <p:sp>
         <p:nvSpPr>
-          <p:cNvPr id="58" name="Shape 56"/>
-          <p:cNvSpPr/>
-          <p:nvPr/>
-        </p:nvSpPr>
-        <p:spPr>
-          <a:xfrm>
-            <a:off x="5973042" y="4169664"/>
-            <a:ext cx="451573" cy="384048"/>
+          <p:cNvPr id="59" name="Shape 57"/>
+          <p:cNvSpPr/>
+          <p:nvPr/>
+        </p:nvSpPr>
+        <p:spPr>
+          <a:xfrm>
+            <a:off x="6703799" y="4169664"/>
+            <a:ext cx="543652" cy="384048"/>
           </a:xfrm>
           <a:prstGeom prst="rect">
             <a:avLst>
@@ -23716,14 +23724,14 @@
       </p:sp>
       <p:sp>
         <p:nvSpPr>
-          <p:cNvPr id="59" name="Text 57"/>
-          <p:cNvSpPr/>
-          <p:nvPr/>
-        </p:nvSpPr>
-        <p:spPr>
-          <a:xfrm>
-            <a:off x="5973042" y="4169664"/>
-            <a:ext cx="451573" cy="384048"/>
+          <p:cNvPr id="60" name="Text 58"/>
+          <p:cNvSpPr/>
+          <p:nvPr/>
+        </p:nvSpPr>
+        <p:spPr>
+          <a:xfrm>
+            <a:off x="6703799" y="4169664"/>
+            <a:ext cx="543652" cy="384048"/>
           </a:xfrm>
           <a:prstGeom prst="rect">
             <a:avLst/>
@@ -23747,7 +23755,7 @@
                 <a:ea typeface="Trebuchet MS" pitchFamily="34" charset="-122"/>
                 <a:cs typeface="Trebuchet MS" pitchFamily="34" charset="-120"/>
               </a:rPr>
-              <a:t>c</a:t>
+              <a:t>u</a:t>
             </a:r>
             <a:endParaRPr lang="en-US" sz="900" dirty="0"/>
           </a:p>
@@ -23755,14 +23763,146 @@
       </p:sp>
       <p:sp>
         <p:nvSpPr>
-          <p:cNvPr id="60" name="Text 58"/>
-          <p:cNvSpPr/>
-          <p:nvPr/>
-        </p:nvSpPr>
-        <p:spPr>
-          <a:xfrm>
-            <a:off x="5973042" y="4572000"/>
-            <a:ext cx="451573" cy="219456"/>
+          <p:cNvPr id="61" name="Shape 59"/>
+          <p:cNvSpPr/>
+          <p:nvPr/>
+        </p:nvSpPr>
+        <p:spPr>
+          <a:xfrm>
+            <a:off x="7297743" y="4169664"/>
+            <a:ext cx="543652" cy="384048"/>
+          </a:xfrm>
+          <a:prstGeom prst="rect">
+            <a:avLst>
+              <a:gd name="adj" fmla="val 9524"/>
+            </a:avLst>
+          </a:prstGeom>
+          <a:solidFill>
+            <a:srgbClr val="FFFFFF"/>
+          </a:solidFill>
+          <a:ln w="12700">
+            <a:solidFill>
+              <a:srgbClr val="DB2777"/>
+            </a:solidFill>
+            <a:prstDash val="solid"/>
+          </a:ln>
+        </p:spPr>
+      </p:sp>
+      <p:sp>
+        <p:nvSpPr>
+          <p:cNvPr id="62" name="Text 60"/>
+          <p:cNvSpPr/>
+          <p:nvPr/>
+        </p:nvSpPr>
+        <p:spPr>
+          <a:xfrm>
+            <a:off x="7297743" y="4169664"/>
+            <a:ext cx="543652" cy="384048"/>
+          </a:xfrm>
+          <a:prstGeom prst="rect">
+            <a:avLst/>
+          </a:prstGeom>
+          <a:noFill/>
+          <a:ln/>
+        </p:spPr>
+        <p:txBody>
+          <a:bodyPr wrap="square" lIns="0" tIns="0" rIns="0" bIns="0" rtlCol="0" anchor="ctr"/>
+          <a:lstStyle/>
+          <a:p>
+            <a:pPr algn="ctr" indent="0" marL="0">
+              <a:buNone/>
+            </a:pPr>
+            <a:r>
+              <a:rPr lang="en-US" sz="900" b="1" dirty="0">
+                <a:solidFill>
+                  <a:srgbClr val="9D174D"/>
+                </a:solidFill>
+                <a:latin typeface="Trebuchet MS" pitchFamily="34" charset="0"/>
+                <a:ea typeface="Trebuchet MS" pitchFamily="34" charset="-122"/>
+                <a:cs typeface="Trebuchet MS" pitchFamily="34" charset="-120"/>
+              </a:rPr>
+              <a:t>ll</a:t>
+            </a:r>
+            <a:endParaRPr lang="en-US" sz="900" dirty="0"/>
+          </a:p>
+        </p:txBody>
+      </p:sp>
+      <p:sp>
+        <p:nvSpPr>
+          <p:cNvPr id="63" name="Shape 61"/>
+          <p:cNvSpPr/>
+          <p:nvPr/>
+        </p:nvSpPr>
+        <p:spPr>
+          <a:xfrm>
+            <a:off x="7891688" y="4169664"/>
+            <a:ext cx="543652" cy="384048"/>
+          </a:xfrm>
+          <a:prstGeom prst="rect">
+            <a:avLst>
+              <a:gd name="adj" fmla="val 9524"/>
+            </a:avLst>
+          </a:prstGeom>
+          <a:solidFill>
+            <a:srgbClr val="FFFFFF"/>
+          </a:solidFill>
+          <a:ln w="12700">
+            <a:solidFill>
+              <a:srgbClr val="DB2777"/>
+            </a:solidFill>
+            <a:prstDash val="solid"/>
+          </a:ln>
+        </p:spPr>
+      </p:sp>
+      <p:sp>
+        <p:nvSpPr>
+          <p:cNvPr id="64" name="Text 62"/>
+          <p:cNvSpPr/>
+          <p:nvPr/>
+        </p:nvSpPr>
+        <p:spPr>
+          <a:xfrm>
+            <a:off x="7891688" y="4169664"/>
+            <a:ext cx="543652" cy="384048"/>
+          </a:xfrm>
+          <a:prstGeom prst="rect">
+            <a:avLst/>
+          </a:prstGeom>
+          <a:noFill/>
+          <a:ln/>
+        </p:spPr>
+        <p:txBody>
+          <a:bodyPr wrap="square" lIns="0" tIns="0" rIns="0" bIns="0" rtlCol="0" anchor="ctr"/>
+          <a:lstStyle/>
+          <a:p>
+            <a:pPr algn="ctr" indent="0" marL="0">
+              <a:buNone/>
+            </a:pPr>
+            <a:r>
+              <a:rPr lang="en-US" sz="900" b="1" dirty="0">
+                <a:solidFill>
+                  <a:srgbClr val="9D174D"/>
+                </a:solidFill>
+                <a:latin typeface="Trebuchet MS" pitchFamily="34" charset="0"/>
+                <a:ea typeface="Trebuchet MS" pitchFamily="34" charset="-122"/>
+                <a:cs typeface="Trebuchet MS" pitchFamily="34" charset="-120"/>
+              </a:rPr>
+              <a:t>y</a:t>
+            </a:r>
+            <a:endParaRPr lang="en-US" sz="900" dirty="0"/>
+          </a:p>
+        </p:txBody>
+      </p:sp>
+      <p:sp>
+        <p:nvSpPr>
+          <p:cNvPr id="65" name="Text 63"/>
+          <p:cNvSpPr/>
+          <p:nvPr/>
+        </p:nvSpPr>
+        <p:spPr>
+          <a:xfrm>
+            <a:off x="7891688" y="4572000"/>
+            <a:ext cx="543652" cy="219456"/>
           </a:xfrm>
           <a:prstGeom prst="rect">
             <a:avLst/>
@@ -23786,273 +23926,9 @@
                 <a:ea typeface="Calibri" pitchFamily="34" charset="-122"/>
                 <a:cs typeface="Calibri" pitchFamily="34" charset="-120"/>
               </a:rPr>
-              <a:t>/k/</a:t>
+              <a:t>/ee/</a:t>
             </a:r>
             <a:endParaRPr lang="en-US" sz="750" dirty="0"/>
-          </a:p>
-        </p:txBody>
-      </p:sp>
-      <p:sp>
-        <p:nvSpPr>
-          <p:cNvPr id="61" name="Shape 59"/>
-          <p:cNvSpPr/>
-          <p:nvPr/>
-        </p:nvSpPr>
-        <p:spPr>
-          <a:xfrm>
-            <a:off x="6475560" y="4169664"/>
-            <a:ext cx="451573" cy="384048"/>
-          </a:xfrm>
-          <a:prstGeom prst="rect">
-            <a:avLst>
-              <a:gd name="adj" fmla="val 9524"/>
-            </a:avLst>
-          </a:prstGeom>
-          <a:solidFill>
-            <a:srgbClr val="FFFFFF"/>
-          </a:solidFill>
-          <a:ln w="12700">
-            <a:solidFill>
-              <a:srgbClr val="DB2777"/>
-            </a:solidFill>
-            <a:prstDash val="solid"/>
-          </a:ln>
-        </p:spPr>
-      </p:sp>
-      <p:sp>
-        <p:nvSpPr>
-          <p:cNvPr id="62" name="Text 60"/>
-          <p:cNvSpPr/>
-          <p:nvPr/>
-        </p:nvSpPr>
-        <p:spPr>
-          <a:xfrm>
-            <a:off x="6475560" y="4169664"/>
-            <a:ext cx="451573" cy="384048"/>
-          </a:xfrm>
-          <a:prstGeom prst="rect">
-            <a:avLst/>
-          </a:prstGeom>
-          <a:noFill/>
-          <a:ln/>
-        </p:spPr>
-        <p:txBody>
-          <a:bodyPr wrap="square" lIns="0" tIns="0" rIns="0" bIns="0" rtlCol="0" anchor="ctr"/>
-          <a:lstStyle/>
-          <a:p>
-            <a:pPr algn="ctr" indent="0" marL="0">
-              <a:buNone/>
-            </a:pPr>
-            <a:r>
-              <a:rPr lang="en-US" sz="900" b="1" dirty="0">
-                <a:solidFill>
-                  <a:srgbClr val="9D174D"/>
-                </a:solidFill>
-                <a:latin typeface="Trebuchet MS" pitchFamily="34" charset="0"/>
-                <a:ea typeface="Trebuchet MS" pitchFamily="34" charset="-122"/>
-                <a:cs typeface="Trebuchet MS" pitchFamily="34" charset="-120"/>
-              </a:rPr>
-              <a:t>t</a:t>
-            </a:r>
-            <a:endParaRPr lang="en-US" sz="900" dirty="0"/>
-          </a:p>
-        </p:txBody>
-      </p:sp>
-      <p:sp>
-        <p:nvSpPr>
-          <p:cNvPr id="63" name="Shape 61"/>
-          <p:cNvSpPr/>
-          <p:nvPr/>
-        </p:nvSpPr>
-        <p:spPr>
-          <a:xfrm>
-            <a:off x="6978078" y="4169664"/>
-            <a:ext cx="451573" cy="384048"/>
-          </a:xfrm>
-          <a:prstGeom prst="rect">
-            <a:avLst>
-              <a:gd name="adj" fmla="val 9524"/>
-            </a:avLst>
-          </a:prstGeom>
-          <a:solidFill>
-            <a:srgbClr val="FFFFFF"/>
-          </a:solidFill>
-          <a:ln w="12700">
-            <a:solidFill>
-              <a:srgbClr val="DB2777"/>
-            </a:solidFill>
-            <a:prstDash val="solid"/>
-          </a:ln>
-        </p:spPr>
-      </p:sp>
-      <p:sp>
-        <p:nvSpPr>
-          <p:cNvPr id="64" name="Text 62"/>
-          <p:cNvSpPr/>
-          <p:nvPr/>
-        </p:nvSpPr>
-        <p:spPr>
-          <a:xfrm>
-            <a:off x="6978078" y="4169664"/>
-            <a:ext cx="451573" cy="384048"/>
-          </a:xfrm>
-          <a:prstGeom prst="rect">
-            <a:avLst/>
-          </a:prstGeom>
-          <a:noFill/>
-          <a:ln/>
-        </p:spPr>
-        <p:txBody>
-          <a:bodyPr wrap="square" lIns="0" tIns="0" rIns="0" bIns="0" rtlCol="0" anchor="ctr"/>
-          <a:lstStyle/>
-          <a:p>
-            <a:pPr algn="ctr" indent="0" marL="0">
-              <a:buNone/>
-            </a:pPr>
-            <a:r>
-              <a:rPr lang="en-US" sz="900" b="1" dirty="0">
-                <a:solidFill>
-                  <a:srgbClr val="9D174D"/>
-                </a:solidFill>
-                <a:latin typeface="Trebuchet MS" pitchFamily="34" charset="0"/>
-                <a:ea typeface="Trebuchet MS" pitchFamily="34" charset="-122"/>
-                <a:cs typeface="Trebuchet MS" pitchFamily="34" charset="-120"/>
-              </a:rPr>
-              <a:t>f</a:t>
-            </a:r>
-            <a:endParaRPr lang="en-US" sz="900" dirty="0"/>
-          </a:p>
-        </p:txBody>
-      </p:sp>
-      <p:sp>
-        <p:nvSpPr>
-          <p:cNvPr id="65" name="Shape 63"/>
-          <p:cNvSpPr/>
-          <p:nvPr/>
-        </p:nvSpPr>
-        <p:spPr>
-          <a:xfrm>
-            <a:off x="7480596" y="4169664"/>
-            <a:ext cx="451573" cy="384048"/>
-          </a:xfrm>
-          <a:prstGeom prst="rect">
-            <a:avLst>
-              <a:gd name="adj" fmla="val 9524"/>
-            </a:avLst>
-          </a:prstGeom>
-          <a:solidFill>
-            <a:srgbClr val="FFFFFF"/>
-          </a:solidFill>
-          <a:ln w="12700">
-            <a:solidFill>
-              <a:srgbClr val="DB2777"/>
-            </a:solidFill>
-            <a:prstDash val="solid"/>
-          </a:ln>
-        </p:spPr>
-      </p:sp>
-      <p:sp>
-        <p:nvSpPr>
-          <p:cNvPr id="66" name="Text 64"/>
-          <p:cNvSpPr/>
-          <p:nvPr/>
-        </p:nvSpPr>
-        <p:spPr>
-          <a:xfrm>
-            <a:off x="7480596" y="4169664"/>
-            <a:ext cx="451573" cy="384048"/>
-          </a:xfrm>
-          <a:prstGeom prst="rect">
-            <a:avLst/>
-          </a:prstGeom>
-          <a:noFill/>
-          <a:ln/>
-        </p:spPr>
-        <p:txBody>
-          <a:bodyPr wrap="square" lIns="0" tIns="0" rIns="0" bIns="0" rtlCol="0" anchor="ctr"/>
-          <a:lstStyle/>
-          <a:p>
-            <a:pPr algn="ctr" indent="0" marL="0">
-              <a:buNone/>
-            </a:pPr>
-            <a:r>
-              <a:rPr lang="en-US" sz="900" b="1" dirty="0">
-                <a:solidFill>
-                  <a:srgbClr val="9D174D"/>
-                </a:solidFill>
-                <a:latin typeface="Trebuchet MS" pitchFamily="34" charset="0"/>
-                <a:ea typeface="Trebuchet MS" pitchFamily="34" charset="-122"/>
-                <a:cs typeface="Trebuchet MS" pitchFamily="34" charset="-120"/>
-              </a:rPr>
-              <a:t>u</a:t>
-            </a:r>
-            <a:endParaRPr lang="en-US" sz="900" dirty="0"/>
-          </a:p>
-        </p:txBody>
-      </p:sp>
-      <p:sp>
-        <p:nvSpPr>
-          <p:cNvPr id="67" name="Shape 65"/>
-          <p:cNvSpPr/>
-          <p:nvPr/>
-        </p:nvSpPr>
-        <p:spPr>
-          <a:xfrm>
-            <a:off x="7983114" y="4169664"/>
-            <a:ext cx="451573" cy="384048"/>
-          </a:xfrm>
-          <a:prstGeom prst="rect">
-            <a:avLst>
-              <a:gd name="adj" fmla="val 9524"/>
-            </a:avLst>
-          </a:prstGeom>
-          <a:solidFill>
-            <a:srgbClr val="FFFFFF"/>
-          </a:solidFill>
-          <a:ln w="12700">
-            <a:solidFill>
-              <a:srgbClr val="DB2777"/>
-            </a:solidFill>
-            <a:prstDash val="solid"/>
-          </a:ln>
-        </p:spPr>
-      </p:sp>
-      <p:sp>
-        <p:nvSpPr>
-          <p:cNvPr id="68" name="Text 66"/>
-          <p:cNvSpPr/>
-          <p:nvPr/>
-        </p:nvSpPr>
-        <p:spPr>
-          <a:xfrm>
-            <a:off x="7983114" y="4169664"/>
-            <a:ext cx="451573" cy="384048"/>
-          </a:xfrm>
-          <a:prstGeom prst="rect">
-            <a:avLst/>
-          </a:prstGeom>
-          <a:noFill/>
-          <a:ln/>
-        </p:spPr>
-        <p:txBody>
-          <a:bodyPr wrap="square" lIns="0" tIns="0" rIns="0" bIns="0" rtlCol="0" anchor="ctr"/>
-          <a:lstStyle/>
-          <a:p>
-            <a:pPr algn="ctr" indent="0" marL="0">
-              <a:buNone/>
-            </a:pPr>
-            <a:r>
-              <a:rPr lang="en-US" sz="900" b="1" dirty="0">
-                <a:solidFill>
-                  <a:srgbClr val="9D174D"/>
-                </a:solidFill>
-                <a:latin typeface="Trebuchet MS" pitchFamily="34" charset="0"/>
-                <a:ea typeface="Trebuchet MS" pitchFamily="34" charset="-122"/>
-                <a:cs typeface="Trebuchet MS" pitchFamily="34" charset="-120"/>
-              </a:rPr>
-              <a:t>l</a:t>
-            </a:r>
-            <a:endParaRPr lang="en-US" sz="900" dirty="0"/>
           </a:p>
         </p:txBody>
       </p:sp>
@@ -24481,7 +24357,7 @@
                 <a:ea typeface="Trebuchet MS" pitchFamily="34" charset="-122"/>
                 <a:cs typeface="Trebuchet MS" pitchFamily="34" charset="-120"/>
               </a:rPr>
-              <a:t>respectful</a:t>
+              <a:t>respectable</a:t>
             </a:r>
             <a:endParaRPr lang="en-US" sz="2800" dirty="0"/>
           </a:p>
@@ -25308,7 +25184,7 @@
                 <a:ea typeface="Trebuchet MS" pitchFamily="34" charset="-122"/>
                 <a:cs typeface="Trebuchet MS" pitchFamily="34" charset="-120"/>
               </a:rPr>
-              <a:t>respectful</a:t>
+              <a:t>respectable</a:t>
             </a:r>
             <a:endParaRPr lang="en-US" sz="2800" dirty="0"/>
           </a:p>
@@ -25486,7 +25362,7 @@
                 <a:ea typeface="Calibri" pitchFamily="34" charset="-122"/>
                 <a:cs typeface="Calibri" pitchFamily="34" charset="-120"/>
               </a:rPr>
-              <a:t>to look back at, regard</a:t>
+              <a:t>to regard, look back at</a:t>
             </a:r>
             <a:endParaRPr lang="en-US" sz="850" dirty="0"/>
           </a:p>
@@ -25559,7 +25435,7 @@
                 <a:ea typeface="Trebuchet MS" pitchFamily="34" charset="-122"/>
                 <a:cs typeface="Trebuchet MS" pitchFamily="34" charset="-120"/>
               </a:rPr>
-              <a:t>ful</a:t>
+              <a:t>able</a:t>
             </a:r>
             <a:endParaRPr lang="en-US" sz="1300" dirty="0"/>
           </a:p>
@@ -25598,7 +25474,7 @@
                 <a:ea typeface="Calibri" pitchFamily="34" charset="-122"/>
                 <a:cs typeface="Calibri" pitchFamily="34" charset="-120"/>
               </a:rPr>
-              <a:t>full of</a:t>
+              <a:t>able to be, worthy of</a:t>
             </a:r>
             <a:endParaRPr lang="en-US" sz="850" dirty="0"/>
           </a:p>
@@ -27012,7 +26888,7 @@
                 <a:ea typeface="Trebuchet MS" pitchFamily="34" charset="-122"/>
                 <a:cs typeface="Trebuchet MS" pitchFamily="34" charset="-120"/>
               </a:rPr>
-              <a:t>respectful</a:t>
+              <a:t>respectable</a:t>
             </a:r>
             <a:endParaRPr lang="en-US" sz="2800" dirty="0"/>
           </a:p>
@@ -27190,7 +27066,7 @@
                 <a:ea typeface="Calibri" pitchFamily="34" charset="-122"/>
                 <a:cs typeface="Calibri" pitchFamily="34" charset="-120"/>
               </a:rPr>
-              <a:t>to look back at, regard</a:t>
+              <a:t>to regard, look back at</a:t>
             </a:r>
             <a:endParaRPr lang="en-US" sz="850" dirty="0"/>
           </a:p>
@@ -27263,7 +27139,7 @@
                 <a:ea typeface="Trebuchet MS" pitchFamily="34" charset="-122"/>
                 <a:cs typeface="Trebuchet MS" pitchFamily="34" charset="-120"/>
               </a:rPr>
-              <a:t>ful</a:t>
+              <a:t>able</a:t>
             </a:r>
             <a:endParaRPr lang="en-US" sz="1300" dirty="0"/>
           </a:p>
@@ -27302,7 +27178,7 @@
                 <a:ea typeface="Calibri" pitchFamily="34" charset="-122"/>
                 <a:cs typeface="Calibri" pitchFamily="34" charset="-120"/>
               </a:rPr>
-              <a:t>full of</a:t>
+              <a:t>able to be, worthy of</a:t>
             </a:r>
             <a:endParaRPr lang="en-US" sz="850" dirty="0"/>
           </a:p>
@@ -27409,8 +27285,8 @@
         </p:nvSpPr>
         <p:spPr>
           <a:xfrm>
-            <a:off x="2313432" y="3364992"/>
-            <a:ext cx="1645920" cy="475488"/>
+            <a:off x="1975104" y="3364992"/>
+            <a:ext cx="1554480" cy="475488"/>
           </a:xfrm>
           <a:prstGeom prst="rect">
             <a:avLst>
@@ -27436,8 +27312,8 @@
         </p:nvSpPr>
         <p:spPr>
           <a:xfrm>
-            <a:off x="2313432" y="3364992"/>
-            <a:ext cx="1645920" cy="475488"/>
+            <a:off x="1975104" y="3364992"/>
+            <a:ext cx="1554480" cy="475488"/>
           </a:xfrm>
           <a:prstGeom prst="rect">
             <a:avLst/>
@@ -27475,8 +27351,8 @@
         </p:nvSpPr>
         <p:spPr>
           <a:xfrm>
-            <a:off x="3959352" y="3364992"/>
-            <a:ext cx="411480" cy="475488"/>
+            <a:off x="3529584" y="3364992"/>
+            <a:ext cx="73152" cy="475488"/>
           </a:xfrm>
           <a:prstGeom prst="rect">
             <a:avLst/>
@@ -27514,8 +27390,8 @@
         </p:nvSpPr>
         <p:spPr>
           <a:xfrm>
-            <a:off x="4370832" y="3364992"/>
-            <a:ext cx="1645920" cy="475488"/>
+            <a:off x="3602736" y="3364992"/>
+            <a:ext cx="1554480" cy="475488"/>
           </a:xfrm>
           <a:prstGeom prst="rect">
             <a:avLst>
@@ -27541,8 +27417,8 @@
         </p:nvSpPr>
         <p:spPr>
           <a:xfrm>
-            <a:off x="4370832" y="3364992"/>
-            <a:ext cx="1645920" cy="475488"/>
+            <a:off x="3602736" y="3364992"/>
+            <a:ext cx="1554480" cy="475488"/>
           </a:xfrm>
           <a:prstGeom prst="rect">
             <a:avLst/>
@@ -27580,8 +27456,8 @@
         </p:nvSpPr>
         <p:spPr>
           <a:xfrm>
-            <a:off x="6016752" y="3364992"/>
-            <a:ext cx="411480" cy="475488"/>
+            <a:off x="5157216" y="3364992"/>
+            <a:ext cx="73152" cy="475488"/>
           </a:xfrm>
           <a:prstGeom prst="rect">
             <a:avLst/>
@@ -27619,8 +27495,8 @@
         </p:nvSpPr>
         <p:spPr>
           <a:xfrm>
-            <a:off x="6428232" y="3364992"/>
-            <a:ext cx="1645920" cy="475488"/>
+            <a:off x="5230368" y="3364992"/>
+            <a:ext cx="1554480" cy="475488"/>
           </a:xfrm>
           <a:prstGeom prst="rect">
             <a:avLst>
@@ -27646,8 +27522,8 @@
         </p:nvSpPr>
         <p:spPr>
           <a:xfrm>
-            <a:off x="6428232" y="3364992"/>
-            <a:ext cx="1645920" cy="475488"/>
+            <a:off x="5230368" y="3364992"/>
+            <a:ext cx="1554480" cy="475488"/>
           </a:xfrm>
           <a:prstGeom prst="rect">
             <a:avLst/>
@@ -27671,7 +27547,7 @@
                 <a:ea typeface="Trebuchet MS" pitchFamily="34" charset="-122"/>
                 <a:cs typeface="Trebuchet MS" pitchFamily="34" charset="-120"/>
               </a:rPr>
-              <a:t>ful</a:t>
+              <a:t>a</a:t>
             </a:r>
             <a:endParaRPr lang="en-US" sz="1400" dirty="0"/>
           </a:p>
@@ -27679,7 +27555,112 @@
       </p:sp>
       <p:sp>
         <p:nvSpPr>
-          <p:cNvPr id="33" name="Shape 31"/>
+          <p:cNvPr id="33" name="Text 31"/>
+          <p:cNvSpPr/>
+          <p:nvPr/>
+        </p:nvSpPr>
+        <p:spPr>
+          <a:xfrm>
+            <a:off x="6784848" y="3364992"/>
+            <a:ext cx="73152" cy="475488"/>
+          </a:xfrm>
+          <a:prstGeom prst="rect">
+            <a:avLst/>
+          </a:prstGeom>
+          <a:noFill/>
+          <a:ln/>
+        </p:spPr>
+        <p:txBody>
+          <a:bodyPr wrap="square" lIns="0" tIns="0" rIns="0" bIns="0" rtlCol="0" anchor="ctr"/>
+          <a:lstStyle/>
+          <a:p>
+            <a:pPr algn="ctr" indent="0" marL="0">
+              <a:buNone/>
+            </a:pPr>
+            <a:r>
+              <a:rPr lang="en-US" sz="1600" b="1" dirty="0">
+                <a:solidFill>
+                  <a:srgbClr val="0D9488"/>
+                </a:solidFill>
+                <a:latin typeface="Trebuchet MS" pitchFamily="34" charset="0"/>
+                <a:ea typeface="Trebuchet MS" pitchFamily="34" charset="-122"/>
+                <a:cs typeface="Trebuchet MS" pitchFamily="34" charset="-120"/>
+              </a:rPr>
+              <a:t>·</a:t>
+            </a:r>
+            <a:endParaRPr lang="en-US" sz="1600" dirty="0"/>
+          </a:p>
+        </p:txBody>
+      </p:sp>
+      <p:sp>
+        <p:nvSpPr>
+          <p:cNvPr id="34" name="Shape 32"/>
+          <p:cNvSpPr/>
+          <p:nvPr/>
+        </p:nvSpPr>
+        <p:spPr>
+          <a:xfrm>
+            <a:off x="6858000" y="3364992"/>
+            <a:ext cx="1554480" cy="475488"/>
+          </a:xfrm>
+          <a:prstGeom prst="rect">
+            <a:avLst>
+              <a:gd name="adj" fmla="val 9615"/>
+            </a:avLst>
+          </a:prstGeom>
+          <a:solidFill>
+            <a:srgbClr val="FFFFFF"/>
+          </a:solidFill>
+          <a:ln w="12700">
+            <a:solidFill>
+              <a:srgbClr val="0D9488"/>
+            </a:solidFill>
+            <a:prstDash val="solid"/>
+          </a:ln>
+        </p:spPr>
+      </p:sp>
+      <p:sp>
+        <p:nvSpPr>
+          <p:cNvPr id="35" name="Text 33"/>
+          <p:cNvSpPr/>
+          <p:nvPr/>
+        </p:nvSpPr>
+        <p:spPr>
+          <a:xfrm>
+            <a:off x="6858000" y="3364992"/>
+            <a:ext cx="1554480" cy="475488"/>
+          </a:xfrm>
+          <a:prstGeom prst="rect">
+            <a:avLst/>
+          </a:prstGeom>
+          <a:noFill/>
+          <a:ln/>
+        </p:spPr>
+        <p:txBody>
+          <a:bodyPr wrap="square" lIns="0" tIns="0" rIns="0" bIns="0" rtlCol="0" anchor="ctr"/>
+          <a:lstStyle/>
+          <a:p>
+            <a:pPr algn="ctr" indent="0" marL="0">
+              <a:buNone/>
+            </a:pPr>
+            <a:r>
+              <a:rPr lang="en-US" sz="1400" b="1" dirty="0">
+                <a:solidFill>
+                  <a:srgbClr val="0D9488"/>
+                </a:solidFill>
+                <a:latin typeface="Trebuchet MS" pitchFamily="34" charset="0"/>
+                <a:ea typeface="Trebuchet MS" pitchFamily="34" charset="-122"/>
+                <a:cs typeface="Trebuchet MS" pitchFamily="34" charset="-120"/>
+              </a:rPr>
+              <a:t>ble</a:t>
+            </a:r>
+            <a:endParaRPr lang="en-US" sz="1400" dirty="0"/>
+          </a:p>
+        </p:txBody>
+      </p:sp>
+      <p:sp>
+        <p:nvSpPr>
+          <p:cNvPr id="36" name="Shape 34"/>
           <p:cNvSpPr/>
           <p:nvPr/>
         </p:nvSpPr>
@@ -27706,7 +27687,7 @@
       </p:sp>
       <p:sp>
         <p:nvSpPr>
-          <p:cNvPr id="34" name="Text 32"/>
+          <p:cNvPr id="37" name="Text 35"/>
           <p:cNvSpPr/>
           <p:nvPr/>
         </p:nvSpPr>
@@ -27745,7 +27726,7 @@
       </p:sp>
       <p:sp>
         <p:nvSpPr>
-          <p:cNvPr id="35" name="Shape 33"/>
+          <p:cNvPr id="38" name="Shape 36"/>
           <p:cNvSpPr/>
           <p:nvPr/>
         </p:nvSpPr>
@@ -27772,7 +27753,7 @@
       </p:sp>
       <p:sp>
         <p:nvSpPr>
-          <p:cNvPr id="36" name="Text 34"/>
+          <p:cNvPr id="39" name="Text 37"/>
           <p:cNvSpPr/>
           <p:nvPr/>
         </p:nvSpPr>
@@ -28234,7 +28215,7 @@
                 <a:ea typeface="Trebuchet MS" pitchFamily="34" charset="-122"/>
                 <a:cs typeface="Trebuchet MS" pitchFamily="34" charset="-120"/>
               </a:rPr>
-              <a:t>respectful</a:t>
+              <a:t>respectable</a:t>
             </a:r>
             <a:endParaRPr lang="en-US" sz="2800" dirty="0"/>
           </a:p>
@@ -28412,7 +28393,7 @@
                 <a:ea typeface="Calibri" pitchFamily="34" charset="-122"/>
                 <a:cs typeface="Calibri" pitchFamily="34" charset="-120"/>
               </a:rPr>
-              <a:t>to look back at, regard</a:t>
+              <a:t>to regard, look back at</a:t>
             </a:r>
             <a:endParaRPr lang="en-US" sz="850" dirty="0"/>
           </a:p>
@@ -28485,7 +28466,7 @@
                 <a:ea typeface="Trebuchet MS" pitchFamily="34" charset="-122"/>
                 <a:cs typeface="Trebuchet MS" pitchFamily="34" charset="-120"/>
               </a:rPr>
-              <a:t>ful</a:t>
+              <a:t>able</a:t>
             </a:r>
             <a:endParaRPr lang="en-US" sz="1300" dirty="0"/>
           </a:p>
@@ -28524,7 +28505,7 @@
                 <a:ea typeface="Calibri" pitchFamily="34" charset="-122"/>
                 <a:cs typeface="Calibri" pitchFamily="34" charset="-120"/>
               </a:rPr>
-              <a:t>full of</a:t>
+              <a:t>able to be, worthy of</a:t>
             </a:r>
             <a:endParaRPr lang="en-US" sz="850" dirty="0"/>
           </a:p>
@@ -28631,8 +28612,8 @@
         </p:nvSpPr>
         <p:spPr>
           <a:xfrm>
-            <a:off x="2313432" y="3364992"/>
-            <a:ext cx="1645920" cy="475488"/>
+            <a:off x="1975104" y="3364992"/>
+            <a:ext cx="1554480" cy="475488"/>
           </a:xfrm>
           <a:prstGeom prst="rect">
             <a:avLst>
@@ -28658,8 +28639,8 @@
         </p:nvSpPr>
         <p:spPr>
           <a:xfrm>
-            <a:off x="2313432" y="3364992"/>
-            <a:ext cx="1645920" cy="475488"/>
+            <a:off x="1975104" y="3364992"/>
+            <a:ext cx="1554480" cy="475488"/>
           </a:xfrm>
           <a:prstGeom prst="rect">
             <a:avLst/>
@@ -28697,8 +28678,8 @@
         </p:nvSpPr>
         <p:spPr>
           <a:xfrm>
-            <a:off x="3959352" y="3364992"/>
-            <a:ext cx="411480" cy="475488"/>
+            <a:off x="3529584" y="3364992"/>
+            <a:ext cx="73152" cy="475488"/>
           </a:xfrm>
           <a:prstGeom prst="rect">
             <a:avLst/>
@@ -28736,8 +28717,8 @@
         </p:nvSpPr>
         <p:spPr>
           <a:xfrm>
-            <a:off x="4370832" y="3364992"/>
-            <a:ext cx="1645920" cy="475488"/>
+            <a:off x="3602736" y="3364992"/>
+            <a:ext cx="1554480" cy="475488"/>
           </a:xfrm>
           <a:prstGeom prst="rect">
             <a:avLst>
@@ -28763,8 +28744,8 @@
         </p:nvSpPr>
         <p:spPr>
           <a:xfrm>
-            <a:off x="4370832" y="3364992"/>
-            <a:ext cx="1645920" cy="475488"/>
+            <a:off x="3602736" y="3364992"/>
+            <a:ext cx="1554480" cy="475488"/>
           </a:xfrm>
           <a:prstGeom prst="rect">
             <a:avLst/>
@@ -28802,8 +28783,8 @@
         </p:nvSpPr>
         <p:spPr>
           <a:xfrm>
-            <a:off x="6016752" y="3364992"/>
-            <a:ext cx="411480" cy="475488"/>
+            <a:off x="5157216" y="3364992"/>
+            <a:ext cx="73152" cy="475488"/>
           </a:xfrm>
           <a:prstGeom prst="rect">
             <a:avLst/>
@@ -28841,8 +28822,8 @@
         </p:nvSpPr>
         <p:spPr>
           <a:xfrm>
-            <a:off x="6428232" y="3364992"/>
-            <a:ext cx="1645920" cy="475488"/>
+            <a:off x="5230368" y="3364992"/>
+            <a:ext cx="1554480" cy="475488"/>
           </a:xfrm>
           <a:prstGeom prst="rect">
             <a:avLst>
@@ -28868,8 +28849,8 @@
         </p:nvSpPr>
         <p:spPr>
           <a:xfrm>
-            <a:off x="6428232" y="3364992"/>
-            <a:ext cx="1645920" cy="475488"/>
+            <a:off x="5230368" y="3364992"/>
+            <a:ext cx="1554480" cy="475488"/>
           </a:xfrm>
           <a:prstGeom prst="rect">
             <a:avLst/>
@@ -28893,7 +28874,7 @@
                 <a:ea typeface="Trebuchet MS" pitchFamily="34" charset="-122"/>
                 <a:cs typeface="Trebuchet MS" pitchFamily="34" charset="-120"/>
               </a:rPr>
-              <a:t>ful</a:t>
+              <a:t>a</a:t>
             </a:r>
             <a:endParaRPr lang="en-US" sz="1400" dirty="0"/>
           </a:p>
@@ -28901,7 +28882,112 @@
       </p:sp>
       <p:sp>
         <p:nvSpPr>
-          <p:cNvPr id="33" name="Shape 31"/>
+          <p:cNvPr id="33" name="Text 31"/>
+          <p:cNvSpPr/>
+          <p:nvPr/>
+        </p:nvSpPr>
+        <p:spPr>
+          <a:xfrm>
+            <a:off x="6784848" y="3364992"/>
+            <a:ext cx="73152" cy="475488"/>
+          </a:xfrm>
+          <a:prstGeom prst="rect">
+            <a:avLst/>
+          </a:prstGeom>
+          <a:noFill/>
+          <a:ln/>
+        </p:spPr>
+        <p:txBody>
+          <a:bodyPr wrap="square" lIns="0" tIns="0" rIns="0" bIns="0" rtlCol="0" anchor="ctr"/>
+          <a:lstStyle/>
+          <a:p>
+            <a:pPr algn="ctr" indent="0" marL="0">
+              <a:buNone/>
+            </a:pPr>
+            <a:r>
+              <a:rPr lang="en-US" sz="1600" b="1" dirty="0">
+                <a:solidFill>
+                  <a:srgbClr val="0D9488"/>
+                </a:solidFill>
+                <a:latin typeface="Trebuchet MS" pitchFamily="34" charset="0"/>
+                <a:ea typeface="Trebuchet MS" pitchFamily="34" charset="-122"/>
+                <a:cs typeface="Trebuchet MS" pitchFamily="34" charset="-120"/>
+              </a:rPr>
+              <a:t>·</a:t>
+            </a:r>
+            <a:endParaRPr lang="en-US" sz="1600" dirty="0"/>
+          </a:p>
+        </p:txBody>
+      </p:sp>
+      <p:sp>
+        <p:nvSpPr>
+          <p:cNvPr id="34" name="Shape 32"/>
+          <p:cNvSpPr/>
+          <p:nvPr/>
+        </p:nvSpPr>
+        <p:spPr>
+          <a:xfrm>
+            <a:off x="6858000" y="3364992"/>
+            <a:ext cx="1554480" cy="475488"/>
+          </a:xfrm>
+          <a:prstGeom prst="rect">
+            <a:avLst>
+              <a:gd name="adj" fmla="val 9615"/>
+            </a:avLst>
+          </a:prstGeom>
+          <a:solidFill>
+            <a:srgbClr val="FFFFFF"/>
+          </a:solidFill>
+          <a:ln w="12700">
+            <a:solidFill>
+              <a:srgbClr val="0D9488"/>
+            </a:solidFill>
+            <a:prstDash val="solid"/>
+          </a:ln>
+        </p:spPr>
+      </p:sp>
+      <p:sp>
+        <p:nvSpPr>
+          <p:cNvPr id="35" name="Text 33"/>
+          <p:cNvSpPr/>
+          <p:nvPr/>
+        </p:nvSpPr>
+        <p:spPr>
+          <a:xfrm>
+            <a:off x="6858000" y="3364992"/>
+            <a:ext cx="1554480" cy="475488"/>
+          </a:xfrm>
+          <a:prstGeom prst="rect">
+            <a:avLst/>
+          </a:prstGeom>
+          <a:noFill/>
+          <a:ln/>
+        </p:spPr>
+        <p:txBody>
+          <a:bodyPr wrap="square" lIns="0" tIns="0" rIns="0" bIns="0" rtlCol="0" anchor="ctr"/>
+          <a:lstStyle/>
+          <a:p>
+            <a:pPr algn="ctr" indent="0" marL="0">
+              <a:buNone/>
+            </a:pPr>
+            <a:r>
+              <a:rPr lang="en-US" sz="1400" b="1" dirty="0">
+                <a:solidFill>
+                  <a:srgbClr val="0D9488"/>
+                </a:solidFill>
+                <a:latin typeface="Trebuchet MS" pitchFamily="34" charset="0"/>
+                <a:ea typeface="Trebuchet MS" pitchFamily="34" charset="-122"/>
+                <a:cs typeface="Trebuchet MS" pitchFamily="34" charset="-120"/>
+              </a:rPr>
+              <a:t>ble</a:t>
+            </a:r>
+            <a:endParaRPr lang="en-US" sz="1400" dirty="0"/>
+          </a:p>
+        </p:txBody>
+      </p:sp>
+      <p:sp>
+        <p:nvSpPr>
+          <p:cNvPr id="36" name="Shape 34"/>
           <p:cNvSpPr/>
           <p:nvPr/>
         </p:nvSpPr>
@@ -28928,7 +29014,7 @@
       </p:sp>
       <p:sp>
         <p:nvSpPr>
-          <p:cNvPr id="34" name="Text 32"/>
+          <p:cNvPr id="37" name="Text 35"/>
           <p:cNvSpPr/>
           <p:nvPr/>
         </p:nvSpPr>
@@ -28967,7 +29053,7 @@
       </p:sp>
       <p:sp>
         <p:nvSpPr>
-          <p:cNvPr id="35" name="Shape 33"/>
+          <p:cNvPr id="38" name="Shape 36"/>
           <p:cNvSpPr/>
           <p:nvPr/>
         </p:nvSpPr>
@@ -28994,7 +29080,7 @@
       </p:sp>
       <p:sp>
         <p:nvSpPr>
-          <p:cNvPr id="36" name="Shape 34"/>
+          <p:cNvPr id="39" name="Shape 37"/>
           <p:cNvSpPr/>
           <p:nvPr/>
         </p:nvSpPr>
@@ -29021,7 +29107,7 @@
       </p:sp>
       <p:sp>
         <p:nvSpPr>
-          <p:cNvPr id="37" name="Text 35"/>
+          <p:cNvPr id="40" name="Text 38"/>
           <p:cNvSpPr/>
           <p:nvPr/>
         </p:nvSpPr>
@@ -29060,7 +29146,7 @@
       </p:sp>
       <p:sp>
         <p:nvSpPr>
-          <p:cNvPr id="38" name="Shape 36"/>
+          <p:cNvPr id="41" name="Shape 39"/>
           <p:cNvSpPr/>
           <p:nvPr/>
         </p:nvSpPr>
@@ -29087,7 +29173,7 @@
       </p:sp>
       <p:sp>
         <p:nvSpPr>
-          <p:cNvPr id="39" name="Text 37"/>
+          <p:cNvPr id="42" name="Text 40"/>
           <p:cNvSpPr/>
           <p:nvPr/>
         </p:nvSpPr>
@@ -29126,7 +29212,7 @@
       </p:sp>
       <p:sp>
         <p:nvSpPr>
-          <p:cNvPr id="40" name="Shape 38"/>
+          <p:cNvPr id="43" name="Shape 41"/>
           <p:cNvSpPr/>
           <p:nvPr/>
         </p:nvSpPr>
@@ -29153,7 +29239,7 @@
       </p:sp>
       <p:sp>
         <p:nvSpPr>
-          <p:cNvPr id="41" name="Text 39"/>
+          <p:cNvPr id="44" name="Text 42"/>
           <p:cNvSpPr/>
           <p:nvPr/>
         </p:nvSpPr>
@@ -29192,7 +29278,7 @@
       </p:sp>
       <p:sp>
         <p:nvSpPr>
-          <p:cNvPr id="42" name="Shape 40"/>
+          <p:cNvPr id="45" name="Shape 43"/>
           <p:cNvSpPr/>
           <p:nvPr/>
         </p:nvSpPr>
@@ -29219,7 +29305,7 @@
       </p:sp>
       <p:sp>
         <p:nvSpPr>
-          <p:cNvPr id="43" name="Text 41"/>
+          <p:cNvPr id="46" name="Text 44"/>
           <p:cNvSpPr/>
           <p:nvPr/>
         </p:nvSpPr>
@@ -29258,7 +29344,7 @@
       </p:sp>
       <p:sp>
         <p:nvSpPr>
-          <p:cNvPr id="44" name="Shape 42"/>
+          <p:cNvPr id="47" name="Shape 45"/>
           <p:cNvSpPr/>
           <p:nvPr/>
         </p:nvSpPr>
@@ -29285,7 +29371,7 @@
       </p:sp>
       <p:sp>
         <p:nvSpPr>
-          <p:cNvPr id="45" name="Text 43"/>
+          <p:cNvPr id="48" name="Text 46"/>
           <p:cNvSpPr/>
           <p:nvPr/>
         </p:nvSpPr>
@@ -29324,7 +29410,7 @@
       </p:sp>
       <p:sp>
         <p:nvSpPr>
-          <p:cNvPr id="46" name="Shape 44"/>
+          <p:cNvPr id="49" name="Shape 47"/>
           <p:cNvSpPr/>
           <p:nvPr/>
         </p:nvSpPr>
@@ -29351,7 +29437,7 @@
       </p:sp>
       <p:sp>
         <p:nvSpPr>
-          <p:cNvPr id="47" name="Text 45"/>
+          <p:cNvPr id="50" name="Text 48"/>
           <p:cNvSpPr/>
           <p:nvPr/>
         </p:nvSpPr>
@@ -29390,7 +29476,7 @@
       </p:sp>
       <p:sp>
         <p:nvSpPr>
-          <p:cNvPr id="48" name="Text 46"/>
+          <p:cNvPr id="51" name="Text 49"/>
           <p:cNvSpPr/>
           <p:nvPr/>
         </p:nvSpPr>
@@ -29429,7 +29515,7 @@
       </p:sp>
       <p:sp>
         <p:nvSpPr>
-          <p:cNvPr id="49" name="Shape 47"/>
+          <p:cNvPr id="52" name="Shape 50"/>
           <p:cNvSpPr/>
           <p:nvPr/>
         </p:nvSpPr>
@@ -29456,7 +29542,7 @@
       </p:sp>
       <p:sp>
         <p:nvSpPr>
-          <p:cNvPr id="50" name="Text 48"/>
+          <p:cNvPr id="53" name="Text 51"/>
           <p:cNvSpPr/>
           <p:nvPr/>
         </p:nvSpPr>
@@ -29495,7 +29581,7 @@
       </p:sp>
       <p:sp>
         <p:nvSpPr>
-          <p:cNvPr id="51" name="Shape 49"/>
+          <p:cNvPr id="54" name="Shape 52"/>
           <p:cNvSpPr/>
           <p:nvPr/>
         </p:nvSpPr>
@@ -29522,7 +29608,7 @@
       </p:sp>
       <p:sp>
         <p:nvSpPr>
-          <p:cNvPr id="52" name="Text 50"/>
+          <p:cNvPr id="55" name="Text 53"/>
           <p:cNvSpPr/>
           <p:nvPr/>
         </p:nvSpPr>
@@ -29553,7 +29639,7 @@
                 <a:ea typeface="Trebuchet MS" pitchFamily="34" charset="-122"/>
                 <a:cs typeface="Trebuchet MS" pitchFamily="34" charset="-120"/>
               </a:rPr>
-              <a:t>f</a:t>
+              <a:t>a</a:t>
             </a:r>
             <a:endParaRPr lang="en-US" sz="900" dirty="0"/>
           </a:p>
@@ -29561,7 +29647,7 @@
       </p:sp>
       <p:sp>
         <p:nvSpPr>
-          <p:cNvPr id="53" name="Shape 51"/>
+          <p:cNvPr id="56" name="Shape 54"/>
           <p:cNvSpPr/>
           <p:nvPr/>
         </p:nvSpPr>
@@ -29588,7 +29674,7 @@
       </p:sp>
       <p:sp>
         <p:nvSpPr>
-          <p:cNvPr id="54" name="Text 52"/>
+          <p:cNvPr id="57" name="Text 55"/>
           <p:cNvSpPr/>
           <p:nvPr/>
         </p:nvSpPr>
@@ -29619,7 +29705,7 @@
                 <a:ea typeface="Trebuchet MS" pitchFamily="34" charset="-122"/>
                 <a:cs typeface="Trebuchet MS" pitchFamily="34" charset="-120"/>
               </a:rPr>
-              <a:t>u</a:t>
+              <a:t>b</a:t>
             </a:r>
             <a:endParaRPr lang="en-US" sz="900" dirty="0"/>
           </a:p>
@@ -29627,7 +29713,7 @@
       </p:sp>
       <p:sp>
         <p:nvSpPr>
-          <p:cNvPr id="55" name="Shape 53"/>
+          <p:cNvPr id="58" name="Shape 56"/>
           <p:cNvSpPr/>
           <p:nvPr/>
         </p:nvSpPr>
@@ -29654,7 +29740,7 @@
       </p:sp>
       <p:sp>
         <p:nvSpPr>
-          <p:cNvPr id="56" name="Text 54"/>
+          <p:cNvPr id="59" name="Text 57"/>
           <p:cNvSpPr/>
           <p:nvPr/>
         </p:nvSpPr>
@@ -29685,7 +29771,7 @@
                 <a:ea typeface="Trebuchet MS" pitchFamily="34" charset="-122"/>
                 <a:cs typeface="Trebuchet MS" pitchFamily="34" charset="-120"/>
               </a:rPr>
-              <a:t>l</a:t>
+              <a:t>le</a:t>
             </a:r>
             <a:endParaRPr lang="en-US" sz="900" dirty="0"/>
           </a:p>
@@ -30116,7 +30202,7 @@
                 <a:ea typeface="Trebuchet MS" pitchFamily="34" charset="-122"/>
                 <a:cs typeface="Trebuchet MS" pitchFamily="34" charset="-120"/>
               </a:rPr>
-              <a:t>respect</a:t>
+              <a:t>irrespective</a:t>
             </a:r>
             <a:endParaRPr lang="en-US" sz="2800" dirty="0"/>
           </a:p>
@@ -30943,7 +31029,7 @@
                 <a:ea typeface="Trebuchet MS" pitchFamily="34" charset="-122"/>
                 <a:cs typeface="Trebuchet MS" pitchFamily="34" charset="-120"/>
               </a:rPr>
-              <a:t>respect</a:t>
+              <a:t>irrespective</a:t>
             </a:r>
             <a:endParaRPr lang="en-US" sz="2800" dirty="0"/>
           </a:p>
@@ -31023,7 +31109,7 @@
         </p:nvSpPr>
         <p:spPr>
           <a:xfrm>
-            <a:off x="4370832" y="2258568"/>
+            <a:off x="2221992" y="2258568"/>
             <a:ext cx="1828800" cy="292608"/>
           </a:xfrm>
           <a:prstGeom prst="rect">
@@ -31032,11 +31118,11 @@
             </a:avLst>
           </a:prstGeom>
           <a:solidFill>
-            <a:srgbClr val="CCFBF1"/>
+            <a:srgbClr val="DDD6FE"/>
           </a:solidFill>
           <a:ln w="19050">
             <a:solidFill>
-              <a:srgbClr val="0D9488"/>
+              <a:srgbClr val="7C3AED"/>
             </a:solidFill>
             <a:prstDash val="solid"/>
           </a:ln>
@@ -31057,7 +31143,7 @@
         </p:nvSpPr>
         <p:spPr>
           <a:xfrm>
-            <a:off x="4370832" y="2258568"/>
+            <a:off x="2221992" y="2258568"/>
             <a:ext cx="1828800" cy="292608"/>
           </a:xfrm>
           <a:prstGeom prst="rect">
@@ -31076,13 +31162,13 @@
             <a:r>
               <a:rPr lang="en-US" sz="1300" b="1" dirty="0">
                 <a:solidFill>
-                  <a:srgbClr val="0F766E"/>
+                  <a:srgbClr val="4C1D95"/>
                 </a:solidFill>
                 <a:latin typeface="Trebuchet MS" pitchFamily="34" charset="0"/>
                 <a:ea typeface="Trebuchet MS" pitchFamily="34" charset="-122"/>
                 <a:cs typeface="Trebuchet MS" pitchFamily="34" charset="-120"/>
               </a:rPr>
-              <a:t>respect</a:t>
+              <a:t>ir</a:t>
             </a:r>
             <a:endParaRPr lang="en-US" sz="1300" dirty="0"/>
           </a:p>
@@ -31096,7 +31182,7 @@
         </p:nvSpPr>
         <p:spPr>
           <a:xfrm>
-            <a:off x="4370832" y="2569464"/>
+            <a:off x="2221992" y="2569464"/>
             <a:ext cx="1828800" cy="201168"/>
           </a:xfrm>
           <a:prstGeom prst="rect">
@@ -31121,7 +31207,7 @@
                 <a:ea typeface="Calibri" pitchFamily="34" charset="-122"/>
                 <a:cs typeface="Calibri" pitchFamily="34" charset="-120"/>
               </a:rPr>
-              <a:t>to look back at, regard</a:t>
+              <a:t>not, without</a:t>
             </a:r>
             <a:endParaRPr lang="en-US" sz="850" dirty="0"/>
           </a:p>
@@ -31129,7 +31215,270 @@
       </p:sp>
       <p:sp>
         <p:nvSpPr>
-          <p:cNvPr id="19" name="Shape 17"/>
+          <p:cNvPr id="19" name="Text 17"/>
+          <p:cNvSpPr/>
+          <p:nvPr/>
+        </p:nvSpPr>
+        <p:spPr>
+          <a:xfrm>
+            <a:off x="2221992" y="2752344"/>
+            <a:ext cx="1828800" cy="182880"/>
+          </a:xfrm>
+          <a:prstGeom prst="rect">
+            <a:avLst/>
+          </a:prstGeom>
+          <a:noFill/>
+          <a:ln/>
+        </p:spPr>
+        <p:txBody>
+          <a:bodyPr wrap="square" lIns="0" tIns="0" rIns="0" bIns="0" rtlCol="0" anchor="t"/>
+          <a:lstStyle/>
+          <a:p>
+            <a:pPr algn="ctr" indent="0" marL="0">
+              <a:buNone/>
+            </a:pPr>
+            <a:r>
+              <a:rPr lang="en-US" sz="700" i="1" dirty="0">
+                <a:solidFill>
+                  <a:srgbClr val="94A3B8"/>
+                </a:solidFill>
+                <a:latin typeface="Calibri" pitchFamily="34" charset="0"/>
+                <a:ea typeface="Calibri" pitchFamily="34" charset="-122"/>
+                <a:cs typeface="Calibri" pitchFamily="34" charset="-120"/>
+              </a:rPr>
+              <a:t>in → ir before 'r'</a:t>
+            </a:r>
+            <a:endParaRPr lang="en-US" sz="700" dirty="0"/>
+          </a:p>
+        </p:txBody>
+      </p:sp>
+      <p:sp>
+        <p:nvSpPr>
+          <p:cNvPr id="20" name="Shape 18"/>
+          <p:cNvSpPr/>
+          <p:nvPr/>
+        </p:nvSpPr>
+        <p:spPr>
+          <a:xfrm>
+            <a:off x="4370832" y="2258568"/>
+            <a:ext cx="1828800" cy="292608"/>
+          </a:xfrm>
+          <a:prstGeom prst="rect">
+            <a:avLst>
+              <a:gd name="adj" fmla="val 25000"/>
+            </a:avLst>
+          </a:prstGeom>
+          <a:solidFill>
+            <a:srgbClr val="CCFBF1"/>
+          </a:solidFill>
+          <a:ln w="19050">
+            <a:solidFill>
+              <a:srgbClr val="0D9488"/>
+            </a:solidFill>
+            <a:prstDash val="solid"/>
+          </a:ln>
+          <a:effectLst>
+            <a:outerShdw sx="100000" sy="100000" kx="0" ky="0" algn="bl" rotWithShape="0" blurRad="101600" dist="38100" dir="8100000">
+              <a:srgbClr val="000000">
+                <a:alpha val="12000"/>
+              </a:srgbClr>
+            </a:outerShdw>
+          </a:effectLst>
+        </p:spPr>
+      </p:sp>
+      <p:sp>
+        <p:nvSpPr>
+          <p:cNvPr id="21" name="Text 19"/>
+          <p:cNvSpPr/>
+          <p:nvPr/>
+        </p:nvSpPr>
+        <p:spPr>
+          <a:xfrm>
+            <a:off x="4370832" y="2258568"/>
+            <a:ext cx="1828800" cy="292608"/>
+          </a:xfrm>
+          <a:prstGeom prst="rect">
+            <a:avLst/>
+          </a:prstGeom>
+          <a:noFill/>
+          <a:ln/>
+        </p:spPr>
+        <p:txBody>
+          <a:bodyPr wrap="square" lIns="0" tIns="0" rIns="0" bIns="0" rtlCol="0" anchor="ctr"/>
+          <a:lstStyle/>
+          <a:p>
+            <a:pPr algn="ctr" indent="0" marL="0">
+              <a:buNone/>
+            </a:pPr>
+            <a:r>
+              <a:rPr lang="en-US" sz="1300" b="1" dirty="0">
+                <a:solidFill>
+                  <a:srgbClr val="0F766E"/>
+                </a:solidFill>
+                <a:latin typeface="Trebuchet MS" pitchFamily="34" charset="0"/>
+                <a:ea typeface="Trebuchet MS" pitchFamily="34" charset="-122"/>
+                <a:cs typeface="Trebuchet MS" pitchFamily="34" charset="-120"/>
+              </a:rPr>
+              <a:t>respect</a:t>
+            </a:r>
+            <a:endParaRPr lang="en-US" sz="1300" dirty="0"/>
+          </a:p>
+        </p:txBody>
+      </p:sp>
+      <p:sp>
+        <p:nvSpPr>
+          <p:cNvPr id="22" name="Text 20"/>
+          <p:cNvSpPr/>
+          <p:nvPr/>
+        </p:nvSpPr>
+        <p:spPr>
+          <a:xfrm>
+            <a:off x="4370832" y="2569464"/>
+            <a:ext cx="1828800" cy="201168"/>
+          </a:xfrm>
+          <a:prstGeom prst="rect">
+            <a:avLst/>
+          </a:prstGeom>
+          <a:noFill/>
+          <a:ln/>
+        </p:spPr>
+        <p:txBody>
+          <a:bodyPr wrap="square" lIns="0" tIns="0" rIns="0" bIns="0" rtlCol="0" anchor="t"/>
+          <a:lstStyle/>
+          <a:p>
+            <a:pPr algn="ctr" indent="0" marL="0">
+              <a:buNone/>
+            </a:pPr>
+            <a:r>
+              <a:rPr lang="en-US" sz="850" dirty="0">
+                <a:solidFill>
+                  <a:srgbClr val="475569"/>
+                </a:solidFill>
+                <a:latin typeface="Calibri" pitchFamily="34" charset="0"/>
+                <a:ea typeface="Calibri" pitchFamily="34" charset="-122"/>
+                <a:cs typeface="Calibri" pitchFamily="34" charset="-120"/>
+              </a:rPr>
+              <a:t>to regard, look back at</a:t>
+            </a:r>
+            <a:endParaRPr lang="en-US" sz="850" dirty="0"/>
+          </a:p>
+        </p:txBody>
+      </p:sp>
+      <p:sp>
+        <p:nvSpPr>
+          <p:cNvPr id="23" name="Shape 21"/>
+          <p:cNvSpPr/>
+          <p:nvPr/>
+        </p:nvSpPr>
+        <p:spPr>
+          <a:xfrm>
+            <a:off x="6519672" y="2258568"/>
+            <a:ext cx="1828800" cy="292608"/>
+          </a:xfrm>
+          <a:prstGeom prst="rect">
+            <a:avLst>
+              <a:gd name="adj" fmla="val 25000"/>
+            </a:avLst>
+          </a:prstGeom>
+          <a:solidFill>
+            <a:srgbClr val="FCE7F3"/>
+          </a:solidFill>
+          <a:ln w="19050">
+            <a:solidFill>
+              <a:srgbClr val="DB2777"/>
+            </a:solidFill>
+            <a:prstDash val="solid"/>
+          </a:ln>
+          <a:effectLst>
+            <a:outerShdw sx="100000" sy="100000" kx="0" ky="0" algn="bl" rotWithShape="0" blurRad="101600" dist="38100" dir="8100000">
+              <a:srgbClr val="000000">
+                <a:alpha val="12000"/>
+              </a:srgbClr>
+            </a:outerShdw>
+          </a:effectLst>
+        </p:spPr>
+      </p:sp>
+      <p:sp>
+        <p:nvSpPr>
+          <p:cNvPr id="24" name="Text 22"/>
+          <p:cNvSpPr/>
+          <p:nvPr/>
+        </p:nvSpPr>
+        <p:spPr>
+          <a:xfrm>
+            <a:off x="6519672" y="2258568"/>
+            <a:ext cx="1828800" cy="292608"/>
+          </a:xfrm>
+          <a:prstGeom prst="rect">
+            <a:avLst/>
+          </a:prstGeom>
+          <a:noFill/>
+          <a:ln/>
+        </p:spPr>
+        <p:txBody>
+          <a:bodyPr wrap="square" lIns="0" tIns="0" rIns="0" bIns="0" rtlCol="0" anchor="ctr"/>
+          <a:lstStyle/>
+          <a:p>
+            <a:pPr algn="ctr" indent="0" marL="0">
+              <a:buNone/>
+            </a:pPr>
+            <a:r>
+              <a:rPr lang="en-US" sz="1300" b="1" dirty="0">
+                <a:solidFill>
+                  <a:srgbClr val="9D174D"/>
+                </a:solidFill>
+                <a:latin typeface="Trebuchet MS" pitchFamily="34" charset="0"/>
+                <a:ea typeface="Trebuchet MS" pitchFamily="34" charset="-122"/>
+                <a:cs typeface="Trebuchet MS" pitchFamily="34" charset="-120"/>
+              </a:rPr>
+              <a:t>ive</a:t>
+            </a:r>
+            <a:endParaRPr lang="en-US" sz="1300" dirty="0"/>
+          </a:p>
+        </p:txBody>
+      </p:sp>
+      <p:sp>
+        <p:nvSpPr>
+          <p:cNvPr id="25" name="Text 23"/>
+          <p:cNvSpPr/>
+          <p:nvPr/>
+        </p:nvSpPr>
+        <p:spPr>
+          <a:xfrm>
+            <a:off x="6519672" y="2569464"/>
+            <a:ext cx="1828800" cy="201168"/>
+          </a:xfrm>
+          <a:prstGeom prst="rect">
+            <a:avLst/>
+          </a:prstGeom>
+          <a:noFill/>
+          <a:ln/>
+        </p:spPr>
+        <p:txBody>
+          <a:bodyPr wrap="square" lIns="0" tIns="0" rIns="0" bIns="0" rtlCol="0" anchor="t"/>
+          <a:lstStyle/>
+          <a:p>
+            <a:pPr algn="ctr" indent="0" marL="0">
+              <a:buNone/>
+            </a:pPr>
+            <a:r>
+              <a:rPr lang="en-US" sz="850" dirty="0">
+                <a:solidFill>
+                  <a:srgbClr val="475569"/>
+                </a:solidFill>
+                <a:latin typeface="Calibri" pitchFamily="34" charset="0"/>
+                <a:ea typeface="Calibri" pitchFamily="34" charset="-122"/>
+                <a:cs typeface="Calibri" pitchFamily="34" charset="-120"/>
+              </a:rPr>
+              <a:t>relating to, having the quality of</a:t>
+            </a:r>
+            <a:endParaRPr lang="en-US" sz="850" dirty="0"/>
+          </a:p>
+        </p:txBody>
+      </p:sp>
+      <p:sp>
+        <p:nvSpPr>
+          <p:cNvPr id="26" name="Shape 24"/>
           <p:cNvSpPr/>
           <p:nvPr/>
         </p:nvSpPr>
@@ -31156,7 +31505,7 @@
       </p:sp>
       <p:sp>
         <p:nvSpPr>
-          <p:cNvPr id="20" name="Text 18"/>
+          <p:cNvPr id="27" name="Text 25"/>
           <p:cNvSpPr/>
           <p:nvPr/>
         </p:nvSpPr>
@@ -31195,7 +31544,7 @@
       </p:sp>
       <p:sp>
         <p:nvSpPr>
-          <p:cNvPr id="21" name="Shape 19"/>
+          <p:cNvPr id="28" name="Shape 26"/>
           <p:cNvSpPr/>
           <p:nvPr/>
         </p:nvSpPr>
@@ -31222,7 +31571,7 @@
       </p:sp>
       <p:sp>
         <p:nvSpPr>
-          <p:cNvPr id="22" name="Text 20"/>
+          <p:cNvPr id="29" name="Text 27"/>
           <p:cNvSpPr/>
           <p:nvPr/>
         </p:nvSpPr>
@@ -31261,7 +31610,7 @@
       </p:sp>
       <p:sp>
         <p:nvSpPr>
-          <p:cNvPr id="23" name="Shape 21"/>
+          <p:cNvPr id="30" name="Shape 28"/>
           <p:cNvSpPr/>
           <p:nvPr/>
         </p:nvSpPr>
@@ -31288,7 +31637,7 @@
       </p:sp>
       <p:sp>
         <p:nvSpPr>
-          <p:cNvPr id="24" name="Text 22"/>
+          <p:cNvPr id="31" name="Text 29"/>
           <p:cNvSpPr/>
           <p:nvPr/>
         </p:nvSpPr>
@@ -31327,7 +31676,7 @@
       </p:sp>
       <p:sp>
         <p:nvSpPr>
-          <p:cNvPr id="25" name="Shape 23"/>
+          <p:cNvPr id="32" name="Shape 30"/>
           <p:cNvSpPr/>
           <p:nvPr/>
         </p:nvSpPr>
@@ -31354,7 +31703,7 @@
       </p:sp>
       <p:sp>
         <p:nvSpPr>
-          <p:cNvPr id="26" name="Text 24"/>
+          <p:cNvPr id="33" name="Text 31"/>
           <p:cNvSpPr/>
           <p:nvPr/>
         </p:nvSpPr>
@@ -31816,7 +32165,7 @@
                 <a:ea typeface="Trebuchet MS" pitchFamily="34" charset="-122"/>
                 <a:cs typeface="Trebuchet MS" pitchFamily="34" charset="-120"/>
               </a:rPr>
-              <a:t>respect</a:t>
+              <a:t>irrespective</a:t>
             </a:r>
             <a:endParaRPr lang="en-US" sz="2800" dirty="0"/>
           </a:p>
@@ -31896,7 +32245,7 @@
         </p:nvSpPr>
         <p:spPr>
           <a:xfrm>
-            <a:off x="4370832" y="2258568"/>
+            <a:off x="2221992" y="2258568"/>
             <a:ext cx="1828800" cy="292608"/>
           </a:xfrm>
           <a:prstGeom prst="rect">
@@ -31905,11 +32254,11 @@
             </a:avLst>
           </a:prstGeom>
           <a:solidFill>
-            <a:srgbClr val="CCFBF1"/>
+            <a:srgbClr val="DDD6FE"/>
           </a:solidFill>
           <a:ln w="19050">
             <a:solidFill>
-              <a:srgbClr val="0D9488"/>
+              <a:srgbClr val="7C3AED"/>
             </a:solidFill>
             <a:prstDash val="solid"/>
           </a:ln>
@@ -31930,7 +32279,7 @@
         </p:nvSpPr>
         <p:spPr>
           <a:xfrm>
-            <a:off x="4370832" y="2258568"/>
+            <a:off x="2221992" y="2258568"/>
             <a:ext cx="1828800" cy="292608"/>
           </a:xfrm>
           <a:prstGeom prst="rect">
@@ -31949,13 +32298,13 @@
             <a:r>
               <a:rPr lang="en-US" sz="1300" b="1" dirty="0">
                 <a:solidFill>
-                  <a:srgbClr val="0F766E"/>
+                  <a:srgbClr val="4C1D95"/>
                 </a:solidFill>
                 <a:latin typeface="Trebuchet MS" pitchFamily="34" charset="0"/>
                 <a:ea typeface="Trebuchet MS" pitchFamily="34" charset="-122"/>
                 <a:cs typeface="Trebuchet MS" pitchFamily="34" charset="-120"/>
               </a:rPr>
-              <a:t>respect</a:t>
+              <a:t>ir</a:t>
             </a:r>
             <a:endParaRPr lang="en-US" sz="1300" dirty="0"/>
           </a:p>
@@ -31969,7 +32318,7 @@
         </p:nvSpPr>
         <p:spPr>
           <a:xfrm>
-            <a:off x="4370832" y="2569464"/>
+            <a:off x="2221992" y="2569464"/>
             <a:ext cx="1828800" cy="201168"/>
           </a:xfrm>
           <a:prstGeom prst="rect">
@@ -31994,7 +32343,7 @@
                 <a:ea typeface="Calibri" pitchFamily="34" charset="-122"/>
                 <a:cs typeface="Calibri" pitchFamily="34" charset="-120"/>
               </a:rPr>
-              <a:t>to look back at, regard</a:t>
+              <a:t>not, without</a:t>
             </a:r>
             <a:endParaRPr lang="en-US" sz="850" dirty="0"/>
           </a:p>
@@ -32002,7 +32351,270 @@
       </p:sp>
       <p:sp>
         <p:nvSpPr>
-          <p:cNvPr id="19" name="Shape 17"/>
+          <p:cNvPr id="19" name="Text 17"/>
+          <p:cNvSpPr/>
+          <p:nvPr/>
+        </p:nvSpPr>
+        <p:spPr>
+          <a:xfrm>
+            <a:off x="2221992" y="2752344"/>
+            <a:ext cx="1828800" cy="182880"/>
+          </a:xfrm>
+          <a:prstGeom prst="rect">
+            <a:avLst/>
+          </a:prstGeom>
+          <a:noFill/>
+          <a:ln/>
+        </p:spPr>
+        <p:txBody>
+          <a:bodyPr wrap="square" lIns="0" tIns="0" rIns="0" bIns="0" rtlCol="0" anchor="t"/>
+          <a:lstStyle/>
+          <a:p>
+            <a:pPr algn="ctr" indent="0" marL="0">
+              <a:buNone/>
+            </a:pPr>
+            <a:r>
+              <a:rPr lang="en-US" sz="700" i="1" dirty="0">
+                <a:solidFill>
+                  <a:srgbClr val="94A3B8"/>
+                </a:solidFill>
+                <a:latin typeface="Calibri" pitchFamily="34" charset="0"/>
+                <a:ea typeface="Calibri" pitchFamily="34" charset="-122"/>
+                <a:cs typeface="Calibri" pitchFamily="34" charset="-120"/>
+              </a:rPr>
+              <a:t>in → ir before 'r'</a:t>
+            </a:r>
+            <a:endParaRPr lang="en-US" sz="700" dirty="0"/>
+          </a:p>
+        </p:txBody>
+      </p:sp>
+      <p:sp>
+        <p:nvSpPr>
+          <p:cNvPr id="20" name="Shape 18"/>
+          <p:cNvSpPr/>
+          <p:nvPr/>
+        </p:nvSpPr>
+        <p:spPr>
+          <a:xfrm>
+            <a:off x="4370832" y="2258568"/>
+            <a:ext cx="1828800" cy="292608"/>
+          </a:xfrm>
+          <a:prstGeom prst="rect">
+            <a:avLst>
+              <a:gd name="adj" fmla="val 25000"/>
+            </a:avLst>
+          </a:prstGeom>
+          <a:solidFill>
+            <a:srgbClr val="CCFBF1"/>
+          </a:solidFill>
+          <a:ln w="19050">
+            <a:solidFill>
+              <a:srgbClr val="0D9488"/>
+            </a:solidFill>
+            <a:prstDash val="solid"/>
+          </a:ln>
+          <a:effectLst>
+            <a:outerShdw sx="100000" sy="100000" kx="0" ky="0" algn="bl" rotWithShape="0" blurRad="101600" dist="38100" dir="8100000">
+              <a:srgbClr val="000000">
+                <a:alpha val="12000"/>
+              </a:srgbClr>
+            </a:outerShdw>
+          </a:effectLst>
+        </p:spPr>
+      </p:sp>
+      <p:sp>
+        <p:nvSpPr>
+          <p:cNvPr id="21" name="Text 19"/>
+          <p:cNvSpPr/>
+          <p:nvPr/>
+        </p:nvSpPr>
+        <p:spPr>
+          <a:xfrm>
+            <a:off x="4370832" y="2258568"/>
+            <a:ext cx="1828800" cy="292608"/>
+          </a:xfrm>
+          <a:prstGeom prst="rect">
+            <a:avLst/>
+          </a:prstGeom>
+          <a:noFill/>
+          <a:ln/>
+        </p:spPr>
+        <p:txBody>
+          <a:bodyPr wrap="square" lIns="0" tIns="0" rIns="0" bIns="0" rtlCol="0" anchor="ctr"/>
+          <a:lstStyle/>
+          <a:p>
+            <a:pPr algn="ctr" indent="0" marL="0">
+              <a:buNone/>
+            </a:pPr>
+            <a:r>
+              <a:rPr lang="en-US" sz="1300" b="1" dirty="0">
+                <a:solidFill>
+                  <a:srgbClr val="0F766E"/>
+                </a:solidFill>
+                <a:latin typeface="Trebuchet MS" pitchFamily="34" charset="0"/>
+                <a:ea typeface="Trebuchet MS" pitchFamily="34" charset="-122"/>
+                <a:cs typeface="Trebuchet MS" pitchFamily="34" charset="-120"/>
+              </a:rPr>
+              <a:t>respect</a:t>
+            </a:r>
+            <a:endParaRPr lang="en-US" sz="1300" dirty="0"/>
+          </a:p>
+        </p:txBody>
+      </p:sp>
+      <p:sp>
+        <p:nvSpPr>
+          <p:cNvPr id="22" name="Text 20"/>
+          <p:cNvSpPr/>
+          <p:nvPr/>
+        </p:nvSpPr>
+        <p:spPr>
+          <a:xfrm>
+            <a:off x="4370832" y="2569464"/>
+            <a:ext cx="1828800" cy="201168"/>
+          </a:xfrm>
+          <a:prstGeom prst="rect">
+            <a:avLst/>
+          </a:prstGeom>
+          <a:noFill/>
+          <a:ln/>
+        </p:spPr>
+        <p:txBody>
+          <a:bodyPr wrap="square" lIns="0" tIns="0" rIns="0" bIns="0" rtlCol="0" anchor="t"/>
+          <a:lstStyle/>
+          <a:p>
+            <a:pPr algn="ctr" indent="0" marL="0">
+              <a:buNone/>
+            </a:pPr>
+            <a:r>
+              <a:rPr lang="en-US" sz="850" dirty="0">
+                <a:solidFill>
+                  <a:srgbClr val="475569"/>
+                </a:solidFill>
+                <a:latin typeface="Calibri" pitchFamily="34" charset="0"/>
+                <a:ea typeface="Calibri" pitchFamily="34" charset="-122"/>
+                <a:cs typeface="Calibri" pitchFamily="34" charset="-120"/>
+              </a:rPr>
+              <a:t>to regard, look back at</a:t>
+            </a:r>
+            <a:endParaRPr lang="en-US" sz="850" dirty="0"/>
+          </a:p>
+        </p:txBody>
+      </p:sp>
+      <p:sp>
+        <p:nvSpPr>
+          <p:cNvPr id="23" name="Shape 21"/>
+          <p:cNvSpPr/>
+          <p:nvPr/>
+        </p:nvSpPr>
+        <p:spPr>
+          <a:xfrm>
+            <a:off x="6519672" y="2258568"/>
+            <a:ext cx="1828800" cy="292608"/>
+          </a:xfrm>
+          <a:prstGeom prst="rect">
+            <a:avLst>
+              <a:gd name="adj" fmla="val 25000"/>
+            </a:avLst>
+          </a:prstGeom>
+          <a:solidFill>
+            <a:srgbClr val="FCE7F3"/>
+          </a:solidFill>
+          <a:ln w="19050">
+            <a:solidFill>
+              <a:srgbClr val="DB2777"/>
+            </a:solidFill>
+            <a:prstDash val="solid"/>
+          </a:ln>
+          <a:effectLst>
+            <a:outerShdw sx="100000" sy="100000" kx="0" ky="0" algn="bl" rotWithShape="0" blurRad="101600" dist="38100" dir="8100000">
+              <a:srgbClr val="000000">
+                <a:alpha val="12000"/>
+              </a:srgbClr>
+            </a:outerShdw>
+          </a:effectLst>
+        </p:spPr>
+      </p:sp>
+      <p:sp>
+        <p:nvSpPr>
+          <p:cNvPr id="24" name="Text 22"/>
+          <p:cNvSpPr/>
+          <p:nvPr/>
+        </p:nvSpPr>
+        <p:spPr>
+          <a:xfrm>
+            <a:off x="6519672" y="2258568"/>
+            <a:ext cx="1828800" cy="292608"/>
+          </a:xfrm>
+          <a:prstGeom prst="rect">
+            <a:avLst/>
+          </a:prstGeom>
+          <a:noFill/>
+          <a:ln/>
+        </p:spPr>
+        <p:txBody>
+          <a:bodyPr wrap="square" lIns="0" tIns="0" rIns="0" bIns="0" rtlCol="0" anchor="ctr"/>
+          <a:lstStyle/>
+          <a:p>
+            <a:pPr algn="ctr" indent="0" marL="0">
+              <a:buNone/>
+            </a:pPr>
+            <a:r>
+              <a:rPr lang="en-US" sz="1300" b="1" dirty="0">
+                <a:solidFill>
+                  <a:srgbClr val="9D174D"/>
+                </a:solidFill>
+                <a:latin typeface="Trebuchet MS" pitchFamily="34" charset="0"/>
+                <a:ea typeface="Trebuchet MS" pitchFamily="34" charset="-122"/>
+                <a:cs typeface="Trebuchet MS" pitchFamily="34" charset="-120"/>
+              </a:rPr>
+              <a:t>ive</a:t>
+            </a:r>
+            <a:endParaRPr lang="en-US" sz="1300" dirty="0"/>
+          </a:p>
+        </p:txBody>
+      </p:sp>
+      <p:sp>
+        <p:nvSpPr>
+          <p:cNvPr id="25" name="Text 23"/>
+          <p:cNvSpPr/>
+          <p:nvPr/>
+        </p:nvSpPr>
+        <p:spPr>
+          <a:xfrm>
+            <a:off x="6519672" y="2569464"/>
+            <a:ext cx="1828800" cy="201168"/>
+          </a:xfrm>
+          <a:prstGeom prst="rect">
+            <a:avLst/>
+          </a:prstGeom>
+          <a:noFill/>
+          <a:ln/>
+        </p:spPr>
+        <p:txBody>
+          <a:bodyPr wrap="square" lIns="0" tIns="0" rIns="0" bIns="0" rtlCol="0" anchor="t"/>
+          <a:lstStyle/>
+          <a:p>
+            <a:pPr algn="ctr" indent="0" marL="0">
+              <a:buNone/>
+            </a:pPr>
+            <a:r>
+              <a:rPr lang="en-US" sz="850" dirty="0">
+                <a:solidFill>
+                  <a:srgbClr val="475569"/>
+                </a:solidFill>
+                <a:latin typeface="Calibri" pitchFamily="34" charset="0"/>
+                <a:ea typeface="Calibri" pitchFamily="34" charset="-122"/>
+                <a:cs typeface="Calibri" pitchFamily="34" charset="-120"/>
+              </a:rPr>
+              <a:t>relating to, having the quality of</a:t>
+            </a:r>
+            <a:endParaRPr lang="en-US" sz="850" dirty="0"/>
+          </a:p>
+        </p:txBody>
+      </p:sp>
+      <p:sp>
+        <p:nvSpPr>
+          <p:cNvPr id="26" name="Shape 24"/>
           <p:cNvSpPr/>
           <p:nvPr/>
         </p:nvSpPr>
@@ -32029,7 +32641,7 @@
       </p:sp>
       <p:sp>
         <p:nvSpPr>
-          <p:cNvPr id="20" name="Text 18"/>
+          <p:cNvPr id="27" name="Text 25"/>
           <p:cNvSpPr/>
           <p:nvPr/>
         </p:nvSpPr>
@@ -32068,7 +32680,7 @@
       </p:sp>
       <p:sp>
         <p:nvSpPr>
-          <p:cNvPr id="21" name="Shape 19"/>
+          <p:cNvPr id="28" name="Shape 26"/>
           <p:cNvSpPr/>
           <p:nvPr/>
         </p:nvSpPr>
@@ -32095,14 +32707,14 @@
       </p:sp>
       <p:sp>
         <p:nvSpPr>
-          <p:cNvPr id="22" name="Shape 20"/>
-          <p:cNvSpPr/>
-          <p:nvPr/>
-        </p:nvSpPr>
-        <p:spPr>
-          <a:xfrm>
-            <a:off x="2999232" y="3364992"/>
-            <a:ext cx="1645920" cy="475488"/>
+          <p:cNvPr id="29" name="Shape 27"/>
+          <p:cNvSpPr/>
+          <p:nvPr/>
+        </p:nvSpPr>
+        <p:spPr>
+          <a:xfrm>
+            <a:off x="1975104" y="3364992"/>
+            <a:ext cx="1554480" cy="475488"/>
           </a:xfrm>
           <a:prstGeom prst="rect">
             <a:avLst>
@@ -32122,14 +32734,14 @@
       </p:sp>
       <p:sp>
         <p:nvSpPr>
-          <p:cNvPr id="23" name="Text 21"/>
-          <p:cNvSpPr/>
-          <p:nvPr/>
-        </p:nvSpPr>
-        <p:spPr>
-          <a:xfrm>
-            <a:off x="2999232" y="3364992"/>
-            <a:ext cx="1645920" cy="475488"/>
+          <p:cNvPr id="30" name="Text 28"/>
+          <p:cNvSpPr/>
+          <p:nvPr/>
+        </p:nvSpPr>
+        <p:spPr>
+          <a:xfrm>
+            <a:off x="1975104" y="3364992"/>
+            <a:ext cx="1554480" cy="475488"/>
           </a:xfrm>
           <a:prstGeom prst="rect">
             <a:avLst/>
@@ -32153,7 +32765,7 @@
                 <a:ea typeface="Trebuchet MS" pitchFamily="34" charset="-122"/>
                 <a:cs typeface="Trebuchet MS" pitchFamily="34" charset="-120"/>
               </a:rPr>
-              <a:t>re</a:t>
+              <a:t>ir</a:t>
             </a:r>
             <a:endParaRPr lang="en-US" sz="1400" dirty="0"/>
           </a:p>
@@ -32161,14 +32773,14 @@
       </p:sp>
       <p:sp>
         <p:nvSpPr>
-          <p:cNvPr id="24" name="Text 22"/>
-          <p:cNvSpPr/>
-          <p:nvPr/>
-        </p:nvSpPr>
-        <p:spPr>
-          <a:xfrm>
-            <a:off x="4645152" y="3364992"/>
-            <a:ext cx="1097280" cy="475488"/>
+          <p:cNvPr id="31" name="Text 29"/>
+          <p:cNvSpPr/>
+          <p:nvPr/>
+        </p:nvSpPr>
+        <p:spPr>
+          <a:xfrm>
+            <a:off x="3529584" y="3364992"/>
+            <a:ext cx="73152" cy="475488"/>
           </a:xfrm>
           <a:prstGeom prst="rect">
             <a:avLst/>
@@ -32200,14 +32812,14 @@
       </p:sp>
       <p:sp>
         <p:nvSpPr>
-          <p:cNvPr id="25" name="Shape 23"/>
-          <p:cNvSpPr/>
-          <p:nvPr/>
-        </p:nvSpPr>
-        <p:spPr>
-          <a:xfrm>
-            <a:off x="5742432" y="3364992"/>
-            <a:ext cx="1645920" cy="475488"/>
+          <p:cNvPr id="32" name="Shape 30"/>
+          <p:cNvSpPr/>
+          <p:nvPr/>
+        </p:nvSpPr>
+        <p:spPr>
+          <a:xfrm>
+            <a:off x="3602736" y="3364992"/>
+            <a:ext cx="1554480" cy="475488"/>
           </a:xfrm>
           <a:prstGeom prst="rect">
             <a:avLst>
@@ -32227,14 +32839,14 @@
       </p:sp>
       <p:sp>
         <p:nvSpPr>
-          <p:cNvPr id="26" name="Text 24"/>
-          <p:cNvSpPr/>
-          <p:nvPr/>
-        </p:nvSpPr>
-        <p:spPr>
-          <a:xfrm>
-            <a:off x="5742432" y="3364992"/>
-            <a:ext cx="1645920" cy="475488"/>
+          <p:cNvPr id="33" name="Text 31"/>
+          <p:cNvSpPr/>
+          <p:nvPr/>
+        </p:nvSpPr>
+        <p:spPr>
+          <a:xfrm>
+            <a:off x="3602736" y="3364992"/>
+            <a:ext cx="1554480" cy="475488"/>
           </a:xfrm>
           <a:prstGeom prst="rect">
             <a:avLst/>
@@ -32258,6 +32870,111 @@
                 <a:ea typeface="Trebuchet MS" pitchFamily="34" charset="-122"/>
                 <a:cs typeface="Trebuchet MS" pitchFamily="34" charset="-120"/>
               </a:rPr>
+              <a:t>re</a:t>
+            </a:r>
+            <a:endParaRPr lang="en-US" sz="1400" dirty="0"/>
+          </a:p>
+        </p:txBody>
+      </p:sp>
+      <p:sp>
+        <p:nvSpPr>
+          <p:cNvPr id="34" name="Text 32"/>
+          <p:cNvSpPr/>
+          <p:nvPr/>
+        </p:nvSpPr>
+        <p:spPr>
+          <a:xfrm>
+            <a:off x="5157216" y="3364992"/>
+            <a:ext cx="73152" cy="475488"/>
+          </a:xfrm>
+          <a:prstGeom prst="rect">
+            <a:avLst/>
+          </a:prstGeom>
+          <a:noFill/>
+          <a:ln/>
+        </p:spPr>
+        <p:txBody>
+          <a:bodyPr wrap="square" lIns="0" tIns="0" rIns="0" bIns="0" rtlCol="0" anchor="ctr"/>
+          <a:lstStyle/>
+          <a:p>
+            <a:pPr algn="ctr" indent="0" marL="0">
+              <a:buNone/>
+            </a:pPr>
+            <a:r>
+              <a:rPr lang="en-US" sz="1600" b="1" dirty="0">
+                <a:solidFill>
+                  <a:srgbClr val="0D9488"/>
+                </a:solidFill>
+                <a:latin typeface="Trebuchet MS" pitchFamily="34" charset="0"/>
+                <a:ea typeface="Trebuchet MS" pitchFamily="34" charset="-122"/>
+                <a:cs typeface="Trebuchet MS" pitchFamily="34" charset="-120"/>
+              </a:rPr>
+              <a:t>·</a:t>
+            </a:r>
+            <a:endParaRPr lang="en-US" sz="1600" dirty="0"/>
+          </a:p>
+        </p:txBody>
+      </p:sp>
+      <p:sp>
+        <p:nvSpPr>
+          <p:cNvPr id="35" name="Shape 33"/>
+          <p:cNvSpPr/>
+          <p:nvPr/>
+        </p:nvSpPr>
+        <p:spPr>
+          <a:xfrm>
+            <a:off x="5230368" y="3364992"/>
+            <a:ext cx="1554480" cy="475488"/>
+          </a:xfrm>
+          <a:prstGeom prst="rect">
+            <a:avLst>
+              <a:gd name="adj" fmla="val 9615"/>
+            </a:avLst>
+          </a:prstGeom>
+          <a:solidFill>
+            <a:srgbClr val="FFFFFF"/>
+          </a:solidFill>
+          <a:ln w="12700">
+            <a:solidFill>
+              <a:srgbClr val="0D9488"/>
+            </a:solidFill>
+            <a:prstDash val="solid"/>
+          </a:ln>
+        </p:spPr>
+      </p:sp>
+      <p:sp>
+        <p:nvSpPr>
+          <p:cNvPr id="36" name="Text 34"/>
+          <p:cNvSpPr/>
+          <p:nvPr/>
+        </p:nvSpPr>
+        <p:spPr>
+          <a:xfrm>
+            <a:off x="5230368" y="3364992"/>
+            <a:ext cx="1554480" cy="475488"/>
+          </a:xfrm>
+          <a:prstGeom prst="rect">
+            <a:avLst/>
+          </a:prstGeom>
+          <a:noFill/>
+          <a:ln/>
+        </p:spPr>
+        <p:txBody>
+          <a:bodyPr wrap="square" lIns="0" tIns="0" rIns="0" bIns="0" rtlCol="0" anchor="ctr"/>
+          <a:lstStyle/>
+          <a:p>
+            <a:pPr algn="ctr" indent="0" marL="0">
+              <a:buNone/>
+            </a:pPr>
+            <a:r>
+              <a:rPr lang="en-US" sz="1400" b="1" dirty="0">
+                <a:solidFill>
+                  <a:srgbClr val="0D9488"/>
+                </a:solidFill>
+                <a:latin typeface="Trebuchet MS" pitchFamily="34" charset="0"/>
+                <a:ea typeface="Trebuchet MS" pitchFamily="34" charset="-122"/>
+                <a:cs typeface="Trebuchet MS" pitchFamily="34" charset="-120"/>
+              </a:rPr>
               <a:t>spect</a:t>
             </a:r>
             <a:endParaRPr lang="en-US" sz="1400" dirty="0"/>
@@ -32266,7 +32983,112 @@
       </p:sp>
       <p:sp>
         <p:nvSpPr>
-          <p:cNvPr id="27" name="Shape 25"/>
+          <p:cNvPr id="37" name="Text 35"/>
+          <p:cNvSpPr/>
+          <p:nvPr/>
+        </p:nvSpPr>
+        <p:spPr>
+          <a:xfrm>
+            <a:off x="6784848" y="3364992"/>
+            <a:ext cx="73152" cy="475488"/>
+          </a:xfrm>
+          <a:prstGeom prst="rect">
+            <a:avLst/>
+          </a:prstGeom>
+          <a:noFill/>
+          <a:ln/>
+        </p:spPr>
+        <p:txBody>
+          <a:bodyPr wrap="square" lIns="0" tIns="0" rIns="0" bIns="0" rtlCol="0" anchor="ctr"/>
+          <a:lstStyle/>
+          <a:p>
+            <a:pPr algn="ctr" indent="0" marL="0">
+              <a:buNone/>
+            </a:pPr>
+            <a:r>
+              <a:rPr lang="en-US" sz="1600" b="1" dirty="0">
+                <a:solidFill>
+                  <a:srgbClr val="0D9488"/>
+                </a:solidFill>
+                <a:latin typeface="Trebuchet MS" pitchFamily="34" charset="0"/>
+                <a:ea typeface="Trebuchet MS" pitchFamily="34" charset="-122"/>
+                <a:cs typeface="Trebuchet MS" pitchFamily="34" charset="-120"/>
+              </a:rPr>
+              <a:t>·</a:t>
+            </a:r>
+            <a:endParaRPr lang="en-US" sz="1600" dirty="0"/>
+          </a:p>
+        </p:txBody>
+      </p:sp>
+      <p:sp>
+        <p:nvSpPr>
+          <p:cNvPr id="38" name="Shape 36"/>
+          <p:cNvSpPr/>
+          <p:nvPr/>
+        </p:nvSpPr>
+        <p:spPr>
+          <a:xfrm>
+            <a:off x="6858000" y="3364992"/>
+            <a:ext cx="1554480" cy="475488"/>
+          </a:xfrm>
+          <a:prstGeom prst="rect">
+            <a:avLst>
+              <a:gd name="adj" fmla="val 9615"/>
+            </a:avLst>
+          </a:prstGeom>
+          <a:solidFill>
+            <a:srgbClr val="FFFFFF"/>
+          </a:solidFill>
+          <a:ln w="12700">
+            <a:solidFill>
+              <a:srgbClr val="0D9488"/>
+            </a:solidFill>
+            <a:prstDash val="solid"/>
+          </a:ln>
+        </p:spPr>
+      </p:sp>
+      <p:sp>
+        <p:nvSpPr>
+          <p:cNvPr id="39" name="Text 37"/>
+          <p:cNvSpPr/>
+          <p:nvPr/>
+        </p:nvSpPr>
+        <p:spPr>
+          <a:xfrm>
+            <a:off x="6858000" y="3364992"/>
+            <a:ext cx="1554480" cy="475488"/>
+          </a:xfrm>
+          <a:prstGeom prst="rect">
+            <a:avLst/>
+          </a:prstGeom>
+          <a:noFill/>
+          <a:ln/>
+        </p:spPr>
+        <p:txBody>
+          <a:bodyPr wrap="square" lIns="0" tIns="0" rIns="0" bIns="0" rtlCol="0" anchor="ctr"/>
+          <a:lstStyle/>
+          <a:p>
+            <a:pPr algn="ctr" indent="0" marL="0">
+              <a:buNone/>
+            </a:pPr>
+            <a:r>
+              <a:rPr lang="en-US" sz="1400" b="1" dirty="0">
+                <a:solidFill>
+                  <a:srgbClr val="0D9488"/>
+                </a:solidFill>
+                <a:latin typeface="Trebuchet MS" pitchFamily="34" charset="0"/>
+                <a:ea typeface="Trebuchet MS" pitchFamily="34" charset="-122"/>
+                <a:cs typeface="Trebuchet MS" pitchFamily="34" charset="-120"/>
+              </a:rPr>
+              <a:t>ive</a:t>
+            </a:r>
+            <a:endParaRPr lang="en-US" sz="1400" dirty="0"/>
+          </a:p>
+        </p:txBody>
+      </p:sp>
+      <p:sp>
+        <p:nvSpPr>
+          <p:cNvPr id="40" name="Shape 38"/>
           <p:cNvSpPr/>
           <p:nvPr/>
         </p:nvSpPr>
@@ -32293,7 +33115,7 @@
       </p:sp>
       <p:sp>
         <p:nvSpPr>
-          <p:cNvPr id="28" name="Text 26"/>
+          <p:cNvPr id="41" name="Text 39"/>
           <p:cNvSpPr/>
           <p:nvPr/>
         </p:nvSpPr>
@@ -32332,7 +33154,7 @@
       </p:sp>
       <p:sp>
         <p:nvSpPr>
-          <p:cNvPr id="29" name="Shape 27"/>
+          <p:cNvPr id="42" name="Shape 40"/>
           <p:cNvSpPr/>
           <p:nvPr/>
         </p:nvSpPr>
@@ -32359,7 +33181,7 @@
       </p:sp>
       <p:sp>
         <p:nvSpPr>
-          <p:cNvPr id="30" name="Text 28"/>
+          <p:cNvPr id="43" name="Text 41"/>
           <p:cNvSpPr/>
           <p:nvPr/>
         </p:nvSpPr>
@@ -32821,7 +33643,7 @@
                 <a:ea typeface="Trebuchet MS" pitchFamily="34" charset="-122"/>
                 <a:cs typeface="Trebuchet MS" pitchFamily="34" charset="-120"/>
               </a:rPr>
-              <a:t>respect</a:t>
+              <a:t>irrespective</a:t>
             </a:r>
             <a:endParaRPr lang="en-US" sz="2800" dirty="0"/>
           </a:p>
@@ -32901,7 +33723,7 @@
         </p:nvSpPr>
         <p:spPr>
           <a:xfrm>
-            <a:off x="4370832" y="2258568"/>
+            <a:off x="2221992" y="2258568"/>
             <a:ext cx="1828800" cy="292608"/>
           </a:xfrm>
           <a:prstGeom prst="rect">
@@ -32910,11 +33732,11 @@
             </a:avLst>
           </a:prstGeom>
           <a:solidFill>
-            <a:srgbClr val="CCFBF1"/>
+            <a:srgbClr val="DDD6FE"/>
           </a:solidFill>
           <a:ln w="19050">
             <a:solidFill>
-              <a:srgbClr val="0D9488"/>
+              <a:srgbClr val="7C3AED"/>
             </a:solidFill>
             <a:prstDash val="solid"/>
           </a:ln>
@@ -32935,7 +33757,7 @@
         </p:nvSpPr>
         <p:spPr>
           <a:xfrm>
-            <a:off x="4370832" y="2258568"/>
+            <a:off x="2221992" y="2258568"/>
             <a:ext cx="1828800" cy="292608"/>
           </a:xfrm>
           <a:prstGeom prst="rect">
@@ -32954,13 +33776,13 @@
             <a:r>
               <a:rPr lang="en-US" sz="1300" b="1" dirty="0">
                 <a:solidFill>
-                  <a:srgbClr val="0F766E"/>
+                  <a:srgbClr val="4C1D95"/>
                 </a:solidFill>
                 <a:latin typeface="Trebuchet MS" pitchFamily="34" charset="0"/>
                 <a:ea typeface="Trebuchet MS" pitchFamily="34" charset="-122"/>
                 <a:cs typeface="Trebuchet MS" pitchFamily="34" charset="-120"/>
               </a:rPr>
-              <a:t>respect</a:t>
+              <a:t>ir</a:t>
             </a:r>
             <a:endParaRPr lang="en-US" sz="1300" dirty="0"/>
           </a:p>
@@ -32974,7 +33796,7 @@
         </p:nvSpPr>
         <p:spPr>
           <a:xfrm>
-            <a:off x="4370832" y="2569464"/>
+            <a:off x="2221992" y="2569464"/>
             <a:ext cx="1828800" cy="201168"/>
           </a:xfrm>
           <a:prstGeom prst="rect">
@@ -32999,7 +33821,7 @@
                 <a:ea typeface="Calibri" pitchFamily="34" charset="-122"/>
                 <a:cs typeface="Calibri" pitchFamily="34" charset="-120"/>
               </a:rPr>
-              <a:t>to look back at, regard</a:t>
+              <a:t>not, without</a:t>
             </a:r>
             <a:endParaRPr lang="en-US" sz="850" dirty="0"/>
           </a:p>
@@ -33007,7 +33829,270 @@
       </p:sp>
       <p:sp>
         <p:nvSpPr>
-          <p:cNvPr id="19" name="Shape 17"/>
+          <p:cNvPr id="19" name="Text 17"/>
+          <p:cNvSpPr/>
+          <p:nvPr/>
+        </p:nvSpPr>
+        <p:spPr>
+          <a:xfrm>
+            <a:off x="2221992" y="2752344"/>
+            <a:ext cx="1828800" cy="182880"/>
+          </a:xfrm>
+          <a:prstGeom prst="rect">
+            <a:avLst/>
+          </a:prstGeom>
+          <a:noFill/>
+          <a:ln/>
+        </p:spPr>
+        <p:txBody>
+          <a:bodyPr wrap="square" lIns="0" tIns="0" rIns="0" bIns="0" rtlCol="0" anchor="t"/>
+          <a:lstStyle/>
+          <a:p>
+            <a:pPr algn="ctr" indent="0" marL="0">
+              <a:buNone/>
+            </a:pPr>
+            <a:r>
+              <a:rPr lang="en-US" sz="700" i="1" dirty="0">
+                <a:solidFill>
+                  <a:srgbClr val="94A3B8"/>
+                </a:solidFill>
+                <a:latin typeface="Calibri" pitchFamily="34" charset="0"/>
+                <a:ea typeface="Calibri" pitchFamily="34" charset="-122"/>
+                <a:cs typeface="Calibri" pitchFamily="34" charset="-120"/>
+              </a:rPr>
+              <a:t>in → ir before 'r'</a:t>
+            </a:r>
+            <a:endParaRPr lang="en-US" sz="700" dirty="0"/>
+          </a:p>
+        </p:txBody>
+      </p:sp>
+      <p:sp>
+        <p:nvSpPr>
+          <p:cNvPr id="20" name="Shape 18"/>
+          <p:cNvSpPr/>
+          <p:nvPr/>
+        </p:nvSpPr>
+        <p:spPr>
+          <a:xfrm>
+            <a:off x="4370832" y="2258568"/>
+            <a:ext cx="1828800" cy="292608"/>
+          </a:xfrm>
+          <a:prstGeom prst="rect">
+            <a:avLst>
+              <a:gd name="adj" fmla="val 25000"/>
+            </a:avLst>
+          </a:prstGeom>
+          <a:solidFill>
+            <a:srgbClr val="CCFBF1"/>
+          </a:solidFill>
+          <a:ln w="19050">
+            <a:solidFill>
+              <a:srgbClr val="0D9488"/>
+            </a:solidFill>
+            <a:prstDash val="solid"/>
+          </a:ln>
+          <a:effectLst>
+            <a:outerShdw sx="100000" sy="100000" kx="0" ky="0" algn="bl" rotWithShape="0" blurRad="101600" dist="38100" dir="8100000">
+              <a:srgbClr val="000000">
+                <a:alpha val="12000"/>
+              </a:srgbClr>
+            </a:outerShdw>
+          </a:effectLst>
+        </p:spPr>
+      </p:sp>
+      <p:sp>
+        <p:nvSpPr>
+          <p:cNvPr id="21" name="Text 19"/>
+          <p:cNvSpPr/>
+          <p:nvPr/>
+        </p:nvSpPr>
+        <p:spPr>
+          <a:xfrm>
+            <a:off x="4370832" y="2258568"/>
+            <a:ext cx="1828800" cy="292608"/>
+          </a:xfrm>
+          <a:prstGeom prst="rect">
+            <a:avLst/>
+          </a:prstGeom>
+          <a:noFill/>
+          <a:ln/>
+        </p:spPr>
+        <p:txBody>
+          <a:bodyPr wrap="square" lIns="0" tIns="0" rIns="0" bIns="0" rtlCol="0" anchor="ctr"/>
+          <a:lstStyle/>
+          <a:p>
+            <a:pPr algn="ctr" indent="0" marL="0">
+              <a:buNone/>
+            </a:pPr>
+            <a:r>
+              <a:rPr lang="en-US" sz="1300" b="1" dirty="0">
+                <a:solidFill>
+                  <a:srgbClr val="0F766E"/>
+                </a:solidFill>
+                <a:latin typeface="Trebuchet MS" pitchFamily="34" charset="0"/>
+                <a:ea typeface="Trebuchet MS" pitchFamily="34" charset="-122"/>
+                <a:cs typeface="Trebuchet MS" pitchFamily="34" charset="-120"/>
+              </a:rPr>
+              <a:t>respect</a:t>
+            </a:r>
+            <a:endParaRPr lang="en-US" sz="1300" dirty="0"/>
+          </a:p>
+        </p:txBody>
+      </p:sp>
+      <p:sp>
+        <p:nvSpPr>
+          <p:cNvPr id="22" name="Text 20"/>
+          <p:cNvSpPr/>
+          <p:nvPr/>
+        </p:nvSpPr>
+        <p:spPr>
+          <a:xfrm>
+            <a:off x="4370832" y="2569464"/>
+            <a:ext cx="1828800" cy="201168"/>
+          </a:xfrm>
+          <a:prstGeom prst="rect">
+            <a:avLst/>
+          </a:prstGeom>
+          <a:noFill/>
+          <a:ln/>
+        </p:spPr>
+        <p:txBody>
+          <a:bodyPr wrap="square" lIns="0" tIns="0" rIns="0" bIns="0" rtlCol="0" anchor="t"/>
+          <a:lstStyle/>
+          <a:p>
+            <a:pPr algn="ctr" indent="0" marL="0">
+              <a:buNone/>
+            </a:pPr>
+            <a:r>
+              <a:rPr lang="en-US" sz="850" dirty="0">
+                <a:solidFill>
+                  <a:srgbClr val="475569"/>
+                </a:solidFill>
+                <a:latin typeface="Calibri" pitchFamily="34" charset="0"/>
+                <a:ea typeface="Calibri" pitchFamily="34" charset="-122"/>
+                <a:cs typeface="Calibri" pitchFamily="34" charset="-120"/>
+              </a:rPr>
+              <a:t>to regard, look back at</a:t>
+            </a:r>
+            <a:endParaRPr lang="en-US" sz="850" dirty="0"/>
+          </a:p>
+        </p:txBody>
+      </p:sp>
+      <p:sp>
+        <p:nvSpPr>
+          <p:cNvPr id="23" name="Shape 21"/>
+          <p:cNvSpPr/>
+          <p:nvPr/>
+        </p:nvSpPr>
+        <p:spPr>
+          <a:xfrm>
+            <a:off x="6519672" y="2258568"/>
+            <a:ext cx="1828800" cy="292608"/>
+          </a:xfrm>
+          <a:prstGeom prst="rect">
+            <a:avLst>
+              <a:gd name="adj" fmla="val 25000"/>
+            </a:avLst>
+          </a:prstGeom>
+          <a:solidFill>
+            <a:srgbClr val="FCE7F3"/>
+          </a:solidFill>
+          <a:ln w="19050">
+            <a:solidFill>
+              <a:srgbClr val="DB2777"/>
+            </a:solidFill>
+            <a:prstDash val="solid"/>
+          </a:ln>
+          <a:effectLst>
+            <a:outerShdw sx="100000" sy="100000" kx="0" ky="0" algn="bl" rotWithShape="0" blurRad="101600" dist="38100" dir="8100000">
+              <a:srgbClr val="000000">
+                <a:alpha val="12000"/>
+              </a:srgbClr>
+            </a:outerShdw>
+          </a:effectLst>
+        </p:spPr>
+      </p:sp>
+      <p:sp>
+        <p:nvSpPr>
+          <p:cNvPr id="24" name="Text 22"/>
+          <p:cNvSpPr/>
+          <p:nvPr/>
+        </p:nvSpPr>
+        <p:spPr>
+          <a:xfrm>
+            <a:off x="6519672" y="2258568"/>
+            <a:ext cx="1828800" cy="292608"/>
+          </a:xfrm>
+          <a:prstGeom prst="rect">
+            <a:avLst/>
+          </a:prstGeom>
+          <a:noFill/>
+          <a:ln/>
+        </p:spPr>
+        <p:txBody>
+          <a:bodyPr wrap="square" lIns="0" tIns="0" rIns="0" bIns="0" rtlCol="0" anchor="ctr"/>
+          <a:lstStyle/>
+          <a:p>
+            <a:pPr algn="ctr" indent="0" marL="0">
+              <a:buNone/>
+            </a:pPr>
+            <a:r>
+              <a:rPr lang="en-US" sz="1300" b="1" dirty="0">
+                <a:solidFill>
+                  <a:srgbClr val="9D174D"/>
+                </a:solidFill>
+                <a:latin typeface="Trebuchet MS" pitchFamily="34" charset="0"/>
+                <a:ea typeface="Trebuchet MS" pitchFamily="34" charset="-122"/>
+                <a:cs typeface="Trebuchet MS" pitchFamily="34" charset="-120"/>
+              </a:rPr>
+              <a:t>ive</a:t>
+            </a:r>
+            <a:endParaRPr lang="en-US" sz="1300" dirty="0"/>
+          </a:p>
+        </p:txBody>
+      </p:sp>
+      <p:sp>
+        <p:nvSpPr>
+          <p:cNvPr id="25" name="Text 23"/>
+          <p:cNvSpPr/>
+          <p:nvPr/>
+        </p:nvSpPr>
+        <p:spPr>
+          <a:xfrm>
+            <a:off x="6519672" y="2569464"/>
+            <a:ext cx="1828800" cy="201168"/>
+          </a:xfrm>
+          <a:prstGeom prst="rect">
+            <a:avLst/>
+          </a:prstGeom>
+          <a:noFill/>
+          <a:ln/>
+        </p:spPr>
+        <p:txBody>
+          <a:bodyPr wrap="square" lIns="0" tIns="0" rIns="0" bIns="0" rtlCol="0" anchor="t"/>
+          <a:lstStyle/>
+          <a:p>
+            <a:pPr algn="ctr" indent="0" marL="0">
+              <a:buNone/>
+            </a:pPr>
+            <a:r>
+              <a:rPr lang="en-US" sz="850" dirty="0">
+                <a:solidFill>
+                  <a:srgbClr val="475569"/>
+                </a:solidFill>
+                <a:latin typeface="Calibri" pitchFamily="34" charset="0"/>
+                <a:ea typeface="Calibri" pitchFamily="34" charset="-122"/>
+                <a:cs typeface="Calibri" pitchFamily="34" charset="-120"/>
+              </a:rPr>
+              <a:t>relating to, having the quality of</a:t>
+            </a:r>
+            <a:endParaRPr lang="en-US" sz="850" dirty="0"/>
+          </a:p>
+        </p:txBody>
+      </p:sp>
+      <p:sp>
+        <p:nvSpPr>
+          <p:cNvPr id="26" name="Shape 24"/>
           <p:cNvSpPr/>
           <p:nvPr/>
         </p:nvSpPr>
@@ -33034,7 +34119,7 @@
       </p:sp>
       <p:sp>
         <p:nvSpPr>
-          <p:cNvPr id="20" name="Text 18"/>
+          <p:cNvPr id="27" name="Text 25"/>
           <p:cNvSpPr/>
           <p:nvPr/>
         </p:nvSpPr>
@@ -33073,7 +34158,7 @@
       </p:sp>
       <p:sp>
         <p:nvSpPr>
-          <p:cNvPr id="21" name="Shape 19"/>
+          <p:cNvPr id="28" name="Shape 26"/>
           <p:cNvSpPr/>
           <p:nvPr/>
         </p:nvSpPr>
@@ -33100,14 +34185,14 @@
       </p:sp>
       <p:sp>
         <p:nvSpPr>
-          <p:cNvPr id="22" name="Shape 20"/>
-          <p:cNvSpPr/>
-          <p:nvPr/>
-        </p:nvSpPr>
-        <p:spPr>
-          <a:xfrm>
-            <a:off x="2999232" y="3364992"/>
-            <a:ext cx="1645920" cy="475488"/>
+          <p:cNvPr id="29" name="Shape 27"/>
+          <p:cNvSpPr/>
+          <p:nvPr/>
+        </p:nvSpPr>
+        <p:spPr>
+          <a:xfrm>
+            <a:off x="1975104" y="3364992"/>
+            <a:ext cx="1554480" cy="475488"/>
           </a:xfrm>
           <a:prstGeom prst="rect">
             <a:avLst>
@@ -33127,14 +34212,14 @@
       </p:sp>
       <p:sp>
         <p:nvSpPr>
-          <p:cNvPr id="23" name="Text 21"/>
-          <p:cNvSpPr/>
-          <p:nvPr/>
-        </p:nvSpPr>
-        <p:spPr>
-          <a:xfrm>
-            <a:off x="2999232" y="3364992"/>
-            <a:ext cx="1645920" cy="475488"/>
+          <p:cNvPr id="30" name="Text 28"/>
+          <p:cNvSpPr/>
+          <p:nvPr/>
+        </p:nvSpPr>
+        <p:spPr>
+          <a:xfrm>
+            <a:off x="1975104" y="3364992"/>
+            <a:ext cx="1554480" cy="475488"/>
           </a:xfrm>
           <a:prstGeom prst="rect">
             <a:avLst/>
@@ -33158,7 +34243,7 @@
                 <a:ea typeface="Trebuchet MS" pitchFamily="34" charset="-122"/>
                 <a:cs typeface="Trebuchet MS" pitchFamily="34" charset="-120"/>
               </a:rPr>
-              <a:t>re</a:t>
+              <a:t>ir</a:t>
             </a:r>
             <a:endParaRPr lang="en-US" sz="1400" dirty="0"/>
           </a:p>
@@ -33166,14 +34251,14 @@
       </p:sp>
       <p:sp>
         <p:nvSpPr>
-          <p:cNvPr id="24" name="Text 22"/>
-          <p:cNvSpPr/>
-          <p:nvPr/>
-        </p:nvSpPr>
-        <p:spPr>
-          <a:xfrm>
-            <a:off x="4645152" y="3364992"/>
-            <a:ext cx="1097280" cy="475488"/>
+          <p:cNvPr id="31" name="Text 29"/>
+          <p:cNvSpPr/>
+          <p:nvPr/>
+        </p:nvSpPr>
+        <p:spPr>
+          <a:xfrm>
+            <a:off x="3529584" y="3364992"/>
+            <a:ext cx="73152" cy="475488"/>
           </a:xfrm>
           <a:prstGeom prst="rect">
             <a:avLst/>
@@ -33205,14 +34290,14 @@
       </p:sp>
       <p:sp>
         <p:nvSpPr>
-          <p:cNvPr id="25" name="Shape 23"/>
-          <p:cNvSpPr/>
-          <p:nvPr/>
-        </p:nvSpPr>
-        <p:spPr>
-          <a:xfrm>
-            <a:off x="5742432" y="3364992"/>
-            <a:ext cx="1645920" cy="475488"/>
+          <p:cNvPr id="32" name="Shape 30"/>
+          <p:cNvSpPr/>
+          <p:nvPr/>
+        </p:nvSpPr>
+        <p:spPr>
+          <a:xfrm>
+            <a:off x="3602736" y="3364992"/>
+            <a:ext cx="1554480" cy="475488"/>
           </a:xfrm>
           <a:prstGeom prst="rect">
             <a:avLst>
@@ -33232,14 +34317,14 @@
       </p:sp>
       <p:sp>
         <p:nvSpPr>
-          <p:cNvPr id="26" name="Text 24"/>
-          <p:cNvSpPr/>
-          <p:nvPr/>
-        </p:nvSpPr>
-        <p:spPr>
-          <a:xfrm>
-            <a:off x="5742432" y="3364992"/>
-            <a:ext cx="1645920" cy="475488"/>
+          <p:cNvPr id="33" name="Text 31"/>
+          <p:cNvSpPr/>
+          <p:nvPr/>
+        </p:nvSpPr>
+        <p:spPr>
+          <a:xfrm>
+            <a:off x="3602736" y="3364992"/>
+            <a:ext cx="1554480" cy="475488"/>
           </a:xfrm>
           <a:prstGeom prst="rect">
             <a:avLst/>
@@ -33263,6 +34348,111 @@
                 <a:ea typeface="Trebuchet MS" pitchFamily="34" charset="-122"/>
                 <a:cs typeface="Trebuchet MS" pitchFamily="34" charset="-120"/>
               </a:rPr>
+              <a:t>re</a:t>
+            </a:r>
+            <a:endParaRPr lang="en-US" sz="1400" dirty="0"/>
+          </a:p>
+        </p:txBody>
+      </p:sp>
+      <p:sp>
+        <p:nvSpPr>
+          <p:cNvPr id="34" name="Text 32"/>
+          <p:cNvSpPr/>
+          <p:nvPr/>
+        </p:nvSpPr>
+        <p:spPr>
+          <a:xfrm>
+            <a:off x="5157216" y="3364992"/>
+            <a:ext cx="73152" cy="475488"/>
+          </a:xfrm>
+          <a:prstGeom prst="rect">
+            <a:avLst/>
+          </a:prstGeom>
+          <a:noFill/>
+          <a:ln/>
+        </p:spPr>
+        <p:txBody>
+          <a:bodyPr wrap="square" lIns="0" tIns="0" rIns="0" bIns="0" rtlCol="0" anchor="ctr"/>
+          <a:lstStyle/>
+          <a:p>
+            <a:pPr algn="ctr" indent="0" marL="0">
+              <a:buNone/>
+            </a:pPr>
+            <a:r>
+              <a:rPr lang="en-US" sz="1600" b="1" dirty="0">
+                <a:solidFill>
+                  <a:srgbClr val="0D9488"/>
+                </a:solidFill>
+                <a:latin typeface="Trebuchet MS" pitchFamily="34" charset="0"/>
+                <a:ea typeface="Trebuchet MS" pitchFamily="34" charset="-122"/>
+                <a:cs typeface="Trebuchet MS" pitchFamily="34" charset="-120"/>
+              </a:rPr>
+              <a:t>·</a:t>
+            </a:r>
+            <a:endParaRPr lang="en-US" sz="1600" dirty="0"/>
+          </a:p>
+        </p:txBody>
+      </p:sp>
+      <p:sp>
+        <p:nvSpPr>
+          <p:cNvPr id="35" name="Shape 33"/>
+          <p:cNvSpPr/>
+          <p:nvPr/>
+        </p:nvSpPr>
+        <p:spPr>
+          <a:xfrm>
+            <a:off x="5230368" y="3364992"/>
+            <a:ext cx="1554480" cy="475488"/>
+          </a:xfrm>
+          <a:prstGeom prst="rect">
+            <a:avLst>
+              <a:gd name="adj" fmla="val 9615"/>
+            </a:avLst>
+          </a:prstGeom>
+          <a:solidFill>
+            <a:srgbClr val="FFFFFF"/>
+          </a:solidFill>
+          <a:ln w="12700">
+            <a:solidFill>
+              <a:srgbClr val="0D9488"/>
+            </a:solidFill>
+            <a:prstDash val="solid"/>
+          </a:ln>
+        </p:spPr>
+      </p:sp>
+      <p:sp>
+        <p:nvSpPr>
+          <p:cNvPr id="36" name="Text 34"/>
+          <p:cNvSpPr/>
+          <p:nvPr/>
+        </p:nvSpPr>
+        <p:spPr>
+          <a:xfrm>
+            <a:off x="5230368" y="3364992"/>
+            <a:ext cx="1554480" cy="475488"/>
+          </a:xfrm>
+          <a:prstGeom prst="rect">
+            <a:avLst/>
+          </a:prstGeom>
+          <a:noFill/>
+          <a:ln/>
+        </p:spPr>
+        <p:txBody>
+          <a:bodyPr wrap="square" lIns="0" tIns="0" rIns="0" bIns="0" rtlCol="0" anchor="ctr"/>
+          <a:lstStyle/>
+          <a:p>
+            <a:pPr algn="ctr" indent="0" marL="0">
+              <a:buNone/>
+            </a:pPr>
+            <a:r>
+              <a:rPr lang="en-US" sz="1400" b="1" dirty="0">
+                <a:solidFill>
+                  <a:srgbClr val="0D9488"/>
+                </a:solidFill>
+                <a:latin typeface="Trebuchet MS" pitchFamily="34" charset="0"/>
+                <a:ea typeface="Trebuchet MS" pitchFamily="34" charset="-122"/>
+                <a:cs typeface="Trebuchet MS" pitchFamily="34" charset="-120"/>
+              </a:rPr>
               <a:t>spect</a:t>
             </a:r>
             <a:endParaRPr lang="en-US" sz="1400" dirty="0"/>
@@ -33271,7 +34461,112 @@
       </p:sp>
       <p:sp>
         <p:nvSpPr>
-          <p:cNvPr id="27" name="Shape 25"/>
+          <p:cNvPr id="37" name="Text 35"/>
+          <p:cNvSpPr/>
+          <p:nvPr/>
+        </p:nvSpPr>
+        <p:spPr>
+          <a:xfrm>
+            <a:off x="6784848" y="3364992"/>
+            <a:ext cx="73152" cy="475488"/>
+          </a:xfrm>
+          <a:prstGeom prst="rect">
+            <a:avLst/>
+          </a:prstGeom>
+          <a:noFill/>
+          <a:ln/>
+        </p:spPr>
+        <p:txBody>
+          <a:bodyPr wrap="square" lIns="0" tIns="0" rIns="0" bIns="0" rtlCol="0" anchor="ctr"/>
+          <a:lstStyle/>
+          <a:p>
+            <a:pPr algn="ctr" indent="0" marL="0">
+              <a:buNone/>
+            </a:pPr>
+            <a:r>
+              <a:rPr lang="en-US" sz="1600" b="1" dirty="0">
+                <a:solidFill>
+                  <a:srgbClr val="0D9488"/>
+                </a:solidFill>
+                <a:latin typeface="Trebuchet MS" pitchFamily="34" charset="0"/>
+                <a:ea typeface="Trebuchet MS" pitchFamily="34" charset="-122"/>
+                <a:cs typeface="Trebuchet MS" pitchFamily="34" charset="-120"/>
+              </a:rPr>
+              <a:t>·</a:t>
+            </a:r>
+            <a:endParaRPr lang="en-US" sz="1600" dirty="0"/>
+          </a:p>
+        </p:txBody>
+      </p:sp>
+      <p:sp>
+        <p:nvSpPr>
+          <p:cNvPr id="38" name="Shape 36"/>
+          <p:cNvSpPr/>
+          <p:nvPr/>
+        </p:nvSpPr>
+        <p:spPr>
+          <a:xfrm>
+            <a:off x="6858000" y="3364992"/>
+            <a:ext cx="1554480" cy="475488"/>
+          </a:xfrm>
+          <a:prstGeom prst="rect">
+            <a:avLst>
+              <a:gd name="adj" fmla="val 9615"/>
+            </a:avLst>
+          </a:prstGeom>
+          <a:solidFill>
+            <a:srgbClr val="FFFFFF"/>
+          </a:solidFill>
+          <a:ln w="12700">
+            <a:solidFill>
+              <a:srgbClr val="0D9488"/>
+            </a:solidFill>
+            <a:prstDash val="solid"/>
+          </a:ln>
+        </p:spPr>
+      </p:sp>
+      <p:sp>
+        <p:nvSpPr>
+          <p:cNvPr id="39" name="Text 37"/>
+          <p:cNvSpPr/>
+          <p:nvPr/>
+        </p:nvSpPr>
+        <p:spPr>
+          <a:xfrm>
+            <a:off x="6858000" y="3364992"/>
+            <a:ext cx="1554480" cy="475488"/>
+          </a:xfrm>
+          <a:prstGeom prst="rect">
+            <a:avLst/>
+          </a:prstGeom>
+          <a:noFill/>
+          <a:ln/>
+        </p:spPr>
+        <p:txBody>
+          <a:bodyPr wrap="square" lIns="0" tIns="0" rIns="0" bIns="0" rtlCol="0" anchor="ctr"/>
+          <a:lstStyle/>
+          <a:p>
+            <a:pPr algn="ctr" indent="0" marL="0">
+              <a:buNone/>
+            </a:pPr>
+            <a:r>
+              <a:rPr lang="en-US" sz="1400" b="1" dirty="0">
+                <a:solidFill>
+                  <a:srgbClr val="0D9488"/>
+                </a:solidFill>
+                <a:latin typeface="Trebuchet MS" pitchFamily="34" charset="0"/>
+                <a:ea typeface="Trebuchet MS" pitchFamily="34" charset="-122"/>
+                <a:cs typeface="Trebuchet MS" pitchFamily="34" charset="-120"/>
+              </a:rPr>
+              <a:t>ive</a:t>
+            </a:r>
+            <a:endParaRPr lang="en-US" sz="1400" dirty="0"/>
+          </a:p>
+        </p:txBody>
+      </p:sp>
+      <p:sp>
+        <p:nvSpPr>
+          <p:cNvPr id="40" name="Shape 38"/>
           <p:cNvSpPr/>
           <p:nvPr/>
         </p:nvSpPr>
@@ -33298,7 +34593,7 @@
       </p:sp>
       <p:sp>
         <p:nvSpPr>
-          <p:cNvPr id="28" name="Text 26"/>
+          <p:cNvPr id="41" name="Text 39"/>
           <p:cNvSpPr/>
           <p:nvPr/>
         </p:nvSpPr>
@@ -33337,7 +34632,7 @@
       </p:sp>
       <p:sp>
         <p:nvSpPr>
-          <p:cNvPr id="29" name="Shape 27"/>
+          <p:cNvPr id="42" name="Shape 40"/>
           <p:cNvSpPr/>
           <p:nvPr/>
         </p:nvSpPr>
@@ -33364,14 +34659,14 @@
       </p:sp>
       <p:sp>
         <p:nvSpPr>
-          <p:cNvPr id="30" name="Shape 28"/>
-          <p:cNvSpPr/>
-          <p:nvPr/>
-        </p:nvSpPr>
-        <p:spPr>
-          <a:xfrm>
-            <a:off x="2124837" y="4169664"/>
-            <a:ext cx="685800" cy="384048"/>
+          <p:cNvPr id="43" name="Shape 41"/>
+          <p:cNvSpPr/>
+          <p:nvPr/>
+        </p:nvSpPr>
+        <p:spPr>
+          <a:xfrm>
+            <a:off x="1952244" y="4169664"/>
+            <a:ext cx="543652" cy="384048"/>
           </a:xfrm>
           <a:prstGeom prst="rect">
             <a:avLst>
@@ -33391,14 +34686,14 @@
       </p:sp>
       <p:sp>
         <p:nvSpPr>
-          <p:cNvPr id="31" name="Text 29"/>
-          <p:cNvSpPr/>
-          <p:nvPr/>
-        </p:nvSpPr>
-        <p:spPr>
-          <a:xfrm>
-            <a:off x="2124837" y="4169664"/>
-            <a:ext cx="685800" cy="384048"/>
+          <p:cNvPr id="44" name="Text 42"/>
+          <p:cNvSpPr/>
+          <p:nvPr/>
+        </p:nvSpPr>
+        <p:spPr>
+          <a:xfrm>
+            <a:off x="1952244" y="4169664"/>
+            <a:ext cx="543652" cy="384048"/>
           </a:xfrm>
           <a:prstGeom prst="rect">
             <a:avLst/>
@@ -33422,7 +34717,7 @@
                 <a:ea typeface="Trebuchet MS" pitchFamily="34" charset="-122"/>
                 <a:cs typeface="Trebuchet MS" pitchFamily="34" charset="-120"/>
               </a:rPr>
-              <a:t>r</a:t>
+              <a:t>i</a:t>
             </a:r>
             <a:endParaRPr lang="en-US" sz="900" dirty="0"/>
           </a:p>
@@ -33430,14 +34725,14 @@
       </p:sp>
       <p:sp>
         <p:nvSpPr>
-          <p:cNvPr id="32" name="Shape 30"/>
-          <p:cNvSpPr/>
-          <p:nvPr/>
-        </p:nvSpPr>
-        <p:spPr>
-          <a:xfrm>
-            <a:off x="3033522" y="4169664"/>
-            <a:ext cx="685800" cy="384048"/>
+          <p:cNvPr id="45" name="Shape 43"/>
+          <p:cNvSpPr/>
+          <p:nvPr/>
+        </p:nvSpPr>
+        <p:spPr>
+          <a:xfrm>
+            <a:off x="2546188" y="4169664"/>
+            <a:ext cx="543652" cy="384048"/>
           </a:xfrm>
           <a:prstGeom prst="rect">
             <a:avLst>
@@ -33457,14 +34752,14 @@
       </p:sp>
       <p:sp>
         <p:nvSpPr>
-          <p:cNvPr id="33" name="Text 31"/>
-          <p:cNvSpPr/>
-          <p:nvPr/>
-        </p:nvSpPr>
-        <p:spPr>
-          <a:xfrm>
-            <a:off x="3033522" y="4169664"/>
-            <a:ext cx="685800" cy="384048"/>
+          <p:cNvPr id="46" name="Text 44"/>
+          <p:cNvSpPr/>
+          <p:nvPr/>
+        </p:nvSpPr>
+        <p:spPr>
+          <a:xfrm>
+            <a:off x="2546188" y="4169664"/>
+            <a:ext cx="543652" cy="384048"/>
           </a:xfrm>
           <a:prstGeom prst="rect">
             <a:avLst/>
@@ -33488,7 +34783,7 @@
                 <a:ea typeface="Trebuchet MS" pitchFamily="34" charset="-122"/>
                 <a:cs typeface="Trebuchet MS" pitchFamily="34" charset="-120"/>
               </a:rPr>
-              <a:t>e</a:t>
+              <a:t>rr</a:t>
             </a:r>
             <a:endParaRPr lang="en-US" sz="900" dirty="0"/>
           </a:p>
@@ -33496,14 +34791,14 @@
       </p:sp>
       <p:sp>
         <p:nvSpPr>
-          <p:cNvPr id="34" name="Shape 32"/>
-          <p:cNvSpPr/>
-          <p:nvPr/>
-        </p:nvSpPr>
-        <p:spPr>
-          <a:xfrm>
-            <a:off x="3942207" y="4169664"/>
-            <a:ext cx="685800" cy="384048"/>
+          <p:cNvPr id="47" name="Shape 45"/>
+          <p:cNvSpPr/>
+          <p:nvPr/>
+        </p:nvSpPr>
+        <p:spPr>
+          <a:xfrm>
+            <a:off x="3140133" y="4169664"/>
+            <a:ext cx="543652" cy="384048"/>
           </a:xfrm>
           <a:prstGeom prst="rect">
             <a:avLst>
@@ -33523,14 +34818,14 @@
       </p:sp>
       <p:sp>
         <p:nvSpPr>
-          <p:cNvPr id="35" name="Text 33"/>
-          <p:cNvSpPr/>
-          <p:nvPr/>
-        </p:nvSpPr>
-        <p:spPr>
-          <a:xfrm>
-            <a:off x="3942207" y="4169664"/>
-            <a:ext cx="685800" cy="384048"/>
+          <p:cNvPr id="48" name="Text 46"/>
+          <p:cNvSpPr/>
+          <p:nvPr/>
+        </p:nvSpPr>
+        <p:spPr>
+          <a:xfrm>
+            <a:off x="3140133" y="4169664"/>
+            <a:ext cx="543652" cy="384048"/>
           </a:xfrm>
           <a:prstGeom prst="rect">
             <a:avLst/>
@@ -33554,7 +34849,7 @@
                 <a:ea typeface="Trebuchet MS" pitchFamily="34" charset="-122"/>
                 <a:cs typeface="Trebuchet MS" pitchFamily="34" charset="-120"/>
               </a:rPr>
-              <a:t>s</a:t>
+              <a:t>e</a:t>
             </a:r>
             <a:endParaRPr lang="en-US" sz="900" dirty="0"/>
           </a:p>
@@ -33562,14 +34857,14 @@
       </p:sp>
       <p:sp>
         <p:nvSpPr>
-          <p:cNvPr id="36" name="Shape 34"/>
-          <p:cNvSpPr/>
-          <p:nvPr/>
-        </p:nvSpPr>
-        <p:spPr>
-          <a:xfrm>
-            <a:off x="4850892" y="4169664"/>
-            <a:ext cx="685800" cy="384048"/>
+          <p:cNvPr id="49" name="Shape 47"/>
+          <p:cNvSpPr/>
+          <p:nvPr/>
+        </p:nvSpPr>
+        <p:spPr>
+          <a:xfrm>
+            <a:off x="3734077" y="4169664"/>
+            <a:ext cx="543652" cy="384048"/>
           </a:xfrm>
           <a:prstGeom prst="rect">
             <a:avLst>
@@ -33589,14 +34884,14 @@
       </p:sp>
       <p:sp>
         <p:nvSpPr>
-          <p:cNvPr id="37" name="Text 35"/>
-          <p:cNvSpPr/>
-          <p:nvPr/>
-        </p:nvSpPr>
-        <p:spPr>
-          <a:xfrm>
-            <a:off x="4850892" y="4169664"/>
-            <a:ext cx="685800" cy="384048"/>
+          <p:cNvPr id="50" name="Text 48"/>
+          <p:cNvSpPr/>
+          <p:nvPr/>
+        </p:nvSpPr>
+        <p:spPr>
+          <a:xfrm>
+            <a:off x="3734077" y="4169664"/>
+            <a:ext cx="543652" cy="384048"/>
           </a:xfrm>
           <a:prstGeom prst="rect">
             <a:avLst/>
@@ -33620,7 +34915,7 @@
                 <a:ea typeface="Trebuchet MS" pitchFamily="34" charset="-122"/>
                 <a:cs typeface="Trebuchet MS" pitchFamily="34" charset="-120"/>
               </a:rPr>
-              <a:t>p</a:t>
+              <a:t>s</a:t>
             </a:r>
             <a:endParaRPr lang="en-US" sz="900" dirty="0"/>
           </a:p>
@@ -33628,14 +34923,14 @@
       </p:sp>
       <p:sp>
         <p:nvSpPr>
-          <p:cNvPr id="38" name="Shape 36"/>
-          <p:cNvSpPr/>
-          <p:nvPr/>
-        </p:nvSpPr>
-        <p:spPr>
-          <a:xfrm>
-            <a:off x="5759577" y="4169664"/>
-            <a:ext cx="685800" cy="384048"/>
+          <p:cNvPr id="51" name="Shape 49"/>
+          <p:cNvSpPr/>
+          <p:nvPr/>
+        </p:nvSpPr>
+        <p:spPr>
+          <a:xfrm>
+            <a:off x="4328021" y="4169664"/>
+            <a:ext cx="543652" cy="384048"/>
           </a:xfrm>
           <a:prstGeom prst="rect">
             <a:avLst>
@@ -33655,14 +34950,14 @@
       </p:sp>
       <p:sp>
         <p:nvSpPr>
-          <p:cNvPr id="39" name="Text 37"/>
-          <p:cNvSpPr/>
-          <p:nvPr/>
-        </p:nvSpPr>
-        <p:spPr>
-          <a:xfrm>
-            <a:off x="5759577" y="4169664"/>
-            <a:ext cx="685800" cy="384048"/>
+          <p:cNvPr id="52" name="Text 50"/>
+          <p:cNvSpPr/>
+          <p:nvPr/>
+        </p:nvSpPr>
+        <p:spPr>
+          <a:xfrm>
+            <a:off x="4328021" y="4169664"/>
+            <a:ext cx="543652" cy="384048"/>
           </a:xfrm>
           <a:prstGeom prst="rect">
             <a:avLst/>
@@ -33686,7 +34981,7 @@
                 <a:ea typeface="Trebuchet MS" pitchFamily="34" charset="-122"/>
                 <a:cs typeface="Trebuchet MS" pitchFamily="34" charset="-120"/>
               </a:rPr>
-              <a:t>e</a:t>
+              <a:t>p</a:t>
             </a:r>
             <a:endParaRPr lang="en-US" sz="900" dirty="0"/>
           </a:p>
@@ -33694,14 +34989,14 @@
       </p:sp>
       <p:sp>
         <p:nvSpPr>
-          <p:cNvPr id="40" name="Shape 38"/>
-          <p:cNvSpPr/>
-          <p:nvPr/>
-        </p:nvSpPr>
-        <p:spPr>
-          <a:xfrm>
-            <a:off x="6668262" y="4169664"/>
-            <a:ext cx="685800" cy="384048"/>
+          <p:cNvPr id="53" name="Shape 51"/>
+          <p:cNvSpPr/>
+          <p:nvPr/>
+        </p:nvSpPr>
+        <p:spPr>
+          <a:xfrm>
+            <a:off x="4921966" y="4169664"/>
+            <a:ext cx="543652" cy="384048"/>
           </a:xfrm>
           <a:prstGeom prst="rect">
             <a:avLst>
@@ -33721,14 +35016,14 @@
       </p:sp>
       <p:sp>
         <p:nvSpPr>
-          <p:cNvPr id="41" name="Text 39"/>
-          <p:cNvSpPr/>
-          <p:nvPr/>
-        </p:nvSpPr>
-        <p:spPr>
-          <a:xfrm>
-            <a:off x="6668262" y="4169664"/>
-            <a:ext cx="685800" cy="384048"/>
+          <p:cNvPr id="54" name="Text 52"/>
+          <p:cNvSpPr/>
+          <p:nvPr/>
+        </p:nvSpPr>
+        <p:spPr>
+          <a:xfrm>
+            <a:off x="4921966" y="4169664"/>
+            <a:ext cx="543652" cy="384048"/>
           </a:xfrm>
           <a:prstGeom prst="rect">
             <a:avLst/>
@@ -33752,6 +35047,72 @@
                 <a:ea typeface="Trebuchet MS" pitchFamily="34" charset="-122"/>
                 <a:cs typeface="Trebuchet MS" pitchFamily="34" charset="-120"/>
               </a:rPr>
+              <a:t>e</a:t>
+            </a:r>
+            <a:endParaRPr lang="en-US" sz="900" dirty="0"/>
+          </a:p>
+        </p:txBody>
+      </p:sp>
+      <p:sp>
+        <p:nvSpPr>
+          <p:cNvPr id="55" name="Shape 53"/>
+          <p:cNvSpPr/>
+          <p:nvPr/>
+        </p:nvSpPr>
+        <p:spPr>
+          <a:xfrm>
+            <a:off x="5515910" y="4169664"/>
+            <a:ext cx="543652" cy="384048"/>
+          </a:xfrm>
+          <a:prstGeom prst="rect">
+            <a:avLst>
+              <a:gd name="adj" fmla="val 9524"/>
+            </a:avLst>
+          </a:prstGeom>
+          <a:solidFill>
+            <a:srgbClr val="FFFFFF"/>
+          </a:solidFill>
+          <a:ln w="12700">
+            <a:solidFill>
+              <a:srgbClr val="DB2777"/>
+            </a:solidFill>
+            <a:prstDash val="solid"/>
+          </a:ln>
+        </p:spPr>
+      </p:sp>
+      <p:sp>
+        <p:nvSpPr>
+          <p:cNvPr id="56" name="Text 54"/>
+          <p:cNvSpPr/>
+          <p:nvPr/>
+        </p:nvSpPr>
+        <p:spPr>
+          <a:xfrm>
+            <a:off x="5515910" y="4169664"/>
+            <a:ext cx="543652" cy="384048"/>
+          </a:xfrm>
+          <a:prstGeom prst="rect">
+            <a:avLst/>
+          </a:prstGeom>
+          <a:noFill/>
+          <a:ln/>
+        </p:spPr>
+        <p:txBody>
+          <a:bodyPr wrap="square" lIns="0" tIns="0" rIns="0" bIns="0" rtlCol="0" anchor="ctr"/>
+          <a:lstStyle/>
+          <a:p>
+            <a:pPr algn="ctr" indent="0" marL="0">
+              <a:buNone/>
+            </a:pPr>
+            <a:r>
+              <a:rPr lang="en-US" sz="900" b="1" dirty="0">
+                <a:solidFill>
+                  <a:srgbClr val="9D174D"/>
+                </a:solidFill>
+                <a:latin typeface="Trebuchet MS" pitchFamily="34" charset="0"/>
+                <a:ea typeface="Trebuchet MS" pitchFamily="34" charset="-122"/>
+                <a:cs typeface="Trebuchet MS" pitchFamily="34" charset="-120"/>
+              </a:rPr>
               <a:t>c</a:t>
             </a:r>
             <a:endParaRPr lang="en-US" sz="900" dirty="0"/>
@@ -33760,14 +35121,14 @@
       </p:sp>
       <p:sp>
         <p:nvSpPr>
-          <p:cNvPr id="42" name="Text 40"/>
-          <p:cNvSpPr/>
-          <p:nvPr/>
-        </p:nvSpPr>
-        <p:spPr>
-          <a:xfrm>
-            <a:off x="6668262" y="4572000"/>
-            <a:ext cx="685800" cy="219456"/>
+          <p:cNvPr id="57" name="Text 55"/>
+          <p:cNvSpPr/>
+          <p:nvPr/>
+        </p:nvSpPr>
+        <p:spPr>
+          <a:xfrm>
+            <a:off x="5515910" y="4572000"/>
+            <a:ext cx="543652" cy="219456"/>
           </a:xfrm>
           <a:prstGeom prst="rect">
             <a:avLst/>
@@ -33799,14 +35160,14 @@
       </p:sp>
       <p:sp>
         <p:nvSpPr>
-          <p:cNvPr id="43" name="Shape 41"/>
-          <p:cNvSpPr/>
-          <p:nvPr/>
-        </p:nvSpPr>
-        <p:spPr>
-          <a:xfrm>
-            <a:off x="7576947" y="4169664"/>
-            <a:ext cx="685800" cy="384048"/>
+          <p:cNvPr id="58" name="Shape 56"/>
+          <p:cNvSpPr/>
+          <p:nvPr/>
+        </p:nvSpPr>
+        <p:spPr>
+          <a:xfrm>
+            <a:off x="6109855" y="4169664"/>
+            <a:ext cx="543652" cy="384048"/>
           </a:xfrm>
           <a:prstGeom prst="rect">
             <a:avLst>
@@ -33826,14 +35187,14 @@
       </p:sp>
       <p:sp>
         <p:nvSpPr>
-          <p:cNvPr id="44" name="Text 42"/>
-          <p:cNvSpPr/>
-          <p:nvPr/>
-        </p:nvSpPr>
-        <p:spPr>
-          <a:xfrm>
-            <a:off x="7576947" y="4169664"/>
-            <a:ext cx="685800" cy="384048"/>
+          <p:cNvPr id="59" name="Text 57"/>
+          <p:cNvSpPr/>
+          <p:nvPr/>
+        </p:nvSpPr>
+        <p:spPr>
+          <a:xfrm>
+            <a:off x="6109855" y="4169664"/>
+            <a:ext cx="543652" cy="384048"/>
           </a:xfrm>
           <a:prstGeom prst="rect">
             <a:avLst/>
@@ -33858,6 +35219,204 @@
                 <a:cs typeface="Trebuchet MS" pitchFamily="34" charset="-120"/>
               </a:rPr>
               <a:t>t</a:t>
+            </a:r>
+            <a:endParaRPr lang="en-US" sz="900" dirty="0"/>
+          </a:p>
+        </p:txBody>
+      </p:sp>
+      <p:sp>
+        <p:nvSpPr>
+          <p:cNvPr id="60" name="Shape 58"/>
+          <p:cNvSpPr/>
+          <p:nvPr/>
+        </p:nvSpPr>
+        <p:spPr>
+          <a:xfrm>
+            <a:off x="6703799" y="4169664"/>
+            <a:ext cx="543652" cy="384048"/>
+          </a:xfrm>
+          <a:prstGeom prst="rect">
+            <a:avLst>
+              <a:gd name="adj" fmla="val 9524"/>
+            </a:avLst>
+          </a:prstGeom>
+          <a:solidFill>
+            <a:srgbClr val="FFFFFF"/>
+          </a:solidFill>
+          <a:ln w="12700">
+            <a:solidFill>
+              <a:srgbClr val="DB2777"/>
+            </a:solidFill>
+            <a:prstDash val="solid"/>
+          </a:ln>
+        </p:spPr>
+      </p:sp>
+      <p:sp>
+        <p:nvSpPr>
+          <p:cNvPr id="61" name="Text 59"/>
+          <p:cNvSpPr/>
+          <p:nvPr/>
+        </p:nvSpPr>
+        <p:spPr>
+          <a:xfrm>
+            <a:off x="6703799" y="4169664"/>
+            <a:ext cx="543652" cy="384048"/>
+          </a:xfrm>
+          <a:prstGeom prst="rect">
+            <a:avLst/>
+          </a:prstGeom>
+          <a:noFill/>
+          <a:ln/>
+        </p:spPr>
+        <p:txBody>
+          <a:bodyPr wrap="square" lIns="0" tIns="0" rIns="0" bIns="0" rtlCol="0" anchor="ctr"/>
+          <a:lstStyle/>
+          <a:p>
+            <a:pPr algn="ctr" indent="0" marL="0">
+              <a:buNone/>
+            </a:pPr>
+            <a:r>
+              <a:rPr lang="en-US" sz="900" b="1" dirty="0">
+                <a:solidFill>
+                  <a:srgbClr val="9D174D"/>
+                </a:solidFill>
+                <a:latin typeface="Trebuchet MS" pitchFamily="34" charset="0"/>
+                <a:ea typeface="Trebuchet MS" pitchFamily="34" charset="-122"/>
+                <a:cs typeface="Trebuchet MS" pitchFamily="34" charset="-120"/>
+              </a:rPr>
+              <a:t>i</a:t>
+            </a:r>
+            <a:endParaRPr lang="en-US" sz="900" dirty="0"/>
+          </a:p>
+        </p:txBody>
+      </p:sp>
+      <p:sp>
+        <p:nvSpPr>
+          <p:cNvPr id="62" name="Shape 60"/>
+          <p:cNvSpPr/>
+          <p:nvPr/>
+        </p:nvSpPr>
+        <p:spPr>
+          <a:xfrm>
+            <a:off x="7297743" y="4169664"/>
+            <a:ext cx="543652" cy="384048"/>
+          </a:xfrm>
+          <a:prstGeom prst="rect">
+            <a:avLst>
+              <a:gd name="adj" fmla="val 9524"/>
+            </a:avLst>
+          </a:prstGeom>
+          <a:solidFill>
+            <a:srgbClr val="FFFFFF"/>
+          </a:solidFill>
+          <a:ln w="12700">
+            <a:solidFill>
+              <a:srgbClr val="DB2777"/>
+            </a:solidFill>
+            <a:prstDash val="solid"/>
+          </a:ln>
+        </p:spPr>
+      </p:sp>
+      <p:sp>
+        <p:nvSpPr>
+          <p:cNvPr id="63" name="Text 61"/>
+          <p:cNvSpPr/>
+          <p:nvPr/>
+        </p:nvSpPr>
+        <p:spPr>
+          <a:xfrm>
+            <a:off x="7297743" y="4169664"/>
+            <a:ext cx="543652" cy="384048"/>
+          </a:xfrm>
+          <a:prstGeom prst="rect">
+            <a:avLst/>
+          </a:prstGeom>
+          <a:noFill/>
+          <a:ln/>
+        </p:spPr>
+        <p:txBody>
+          <a:bodyPr wrap="square" lIns="0" tIns="0" rIns="0" bIns="0" rtlCol="0" anchor="ctr"/>
+          <a:lstStyle/>
+          <a:p>
+            <a:pPr algn="ctr" indent="0" marL="0">
+              <a:buNone/>
+            </a:pPr>
+            <a:r>
+              <a:rPr lang="en-US" sz="900" b="1" dirty="0">
+                <a:solidFill>
+                  <a:srgbClr val="9D174D"/>
+                </a:solidFill>
+                <a:latin typeface="Trebuchet MS" pitchFamily="34" charset="0"/>
+                <a:ea typeface="Trebuchet MS" pitchFamily="34" charset="-122"/>
+                <a:cs typeface="Trebuchet MS" pitchFamily="34" charset="-120"/>
+              </a:rPr>
+              <a:t>v</a:t>
+            </a:r>
+            <a:endParaRPr lang="en-US" sz="900" dirty="0"/>
+          </a:p>
+        </p:txBody>
+      </p:sp>
+      <p:sp>
+        <p:nvSpPr>
+          <p:cNvPr id="64" name="Shape 62"/>
+          <p:cNvSpPr/>
+          <p:nvPr/>
+        </p:nvSpPr>
+        <p:spPr>
+          <a:xfrm>
+            <a:off x="7891688" y="4169664"/>
+            <a:ext cx="543652" cy="384048"/>
+          </a:xfrm>
+          <a:prstGeom prst="rect">
+            <a:avLst>
+              <a:gd name="adj" fmla="val 9524"/>
+            </a:avLst>
+          </a:prstGeom>
+          <a:solidFill>
+            <a:srgbClr val="FFFFFF"/>
+          </a:solidFill>
+          <a:ln w="12700">
+            <a:solidFill>
+              <a:srgbClr val="DB2777"/>
+            </a:solidFill>
+            <a:prstDash val="solid"/>
+          </a:ln>
+        </p:spPr>
+      </p:sp>
+      <p:sp>
+        <p:nvSpPr>
+          <p:cNvPr id="65" name="Text 63"/>
+          <p:cNvSpPr/>
+          <p:nvPr/>
+        </p:nvSpPr>
+        <p:spPr>
+          <a:xfrm>
+            <a:off x="7891688" y="4169664"/>
+            <a:ext cx="543652" cy="384048"/>
+          </a:xfrm>
+          <a:prstGeom prst="rect">
+            <a:avLst/>
+          </a:prstGeom>
+          <a:noFill/>
+          <a:ln/>
+        </p:spPr>
+        <p:txBody>
+          <a:bodyPr wrap="square" lIns="0" tIns="0" rIns="0" bIns="0" rtlCol="0" anchor="ctr"/>
+          <a:lstStyle/>
+          <a:p>
+            <a:pPr algn="ctr" indent="0" marL="0">
+              <a:buNone/>
+            </a:pPr>
+            <a:r>
+              <a:rPr lang="en-US" sz="900" b="1" dirty="0">
+                <a:solidFill>
+                  <a:srgbClr val="9D174D"/>
+                </a:solidFill>
+                <a:latin typeface="Trebuchet MS" pitchFamily="34" charset="0"/>
+                <a:ea typeface="Trebuchet MS" pitchFamily="34" charset="-122"/>
+                <a:cs typeface="Trebuchet MS" pitchFamily="34" charset="-120"/>
+              </a:rPr>
+              <a:t>e</a:t>
             </a:r>
             <a:endParaRPr lang="en-US" sz="900" dirty="0"/>
           </a:p>
@@ -36053,7 +37612,7 @@
                 <a:ea typeface="Trebuchet MS" pitchFamily="34" charset="-122"/>
                 <a:cs typeface="Trebuchet MS" pitchFamily="34" charset="-120"/>
               </a:rPr>
-              <a:t>-ing</a:t>
+              <a:t>-ed</a:t>
             </a:r>
             <a:endParaRPr lang="en-US" sz="1300" dirty="0"/>
           </a:p>
@@ -36206,7 +37765,7 @@
                 <a:ea typeface="Trebuchet MS" pitchFamily="34" charset="-122"/>
                 <a:cs typeface="Trebuchet MS" pitchFamily="34" charset="-120"/>
               </a:rPr>
-              <a:t>-ed</a:t>
+              <a:t>-ing</a:t>
             </a:r>
             <a:endParaRPr lang="en-US" sz="1300" dirty="0"/>
           </a:p>
@@ -36662,7 +38221,7 @@
                 <a:ea typeface="Trebuchet MS" pitchFamily="34" charset="-122"/>
                 <a:cs typeface="Trebuchet MS" pitchFamily="34" charset="-120"/>
               </a:rPr>
-              <a:t>irrespective</a:t>
+              <a:t>respectfully</a:t>
             </a:r>
             <a:endParaRPr lang="en-US" sz="1200" dirty="0"/>
           </a:p>
@@ -36728,7 +38287,7 @@
                 <a:ea typeface="Trebuchet MS" pitchFamily="34" charset="-122"/>
                 <a:cs typeface="Trebuchet MS" pitchFamily="34" charset="-120"/>
               </a:rPr>
-              <a:t>respectable</a:t>
+              <a:t>irrespective</a:t>
             </a:r>
             <a:endParaRPr lang="en-US" sz="1200" dirty="0"/>
           </a:p>
@@ -36794,7 +38353,7 @@
                 <a:ea typeface="Trebuchet MS" pitchFamily="34" charset="-122"/>
                 <a:cs typeface="Trebuchet MS" pitchFamily="34" charset="-120"/>
               </a:rPr>
-              <a:t>respectfully</a:t>
+              <a:t>respectable</a:t>
             </a:r>
             <a:endParaRPr lang="en-US" sz="1200" dirty="0"/>
           </a:p>
@@ -36926,7 +38485,7 @@
                 <a:ea typeface="Trebuchet MS" pitchFamily="34" charset="-122"/>
                 <a:cs typeface="Trebuchet MS" pitchFamily="34" charset="-120"/>
               </a:rPr>
-              <a:t>self-respect</a:t>
+              <a:t>respectless</a:t>
             </a:r>
             <a:endParaRPr lang="en-US" sz="1200" dirty="0"/>
           </a:p>
@@ -38114,7 +39673,7 @@
                 <a:ea typeface="Calibri" pitchFamily="34" charset="-122"/>
                 <a:cs typeface="Calibri" pitchFamily="34" charset="-120"/>
               </a:rPr>
-              <a:t>1.  The root 'respect' comes from a Latin word meaning to look back at or regard.</a:t>
+              <a:t>1.  The root 'respect' means to move forward quickly.</a:t>
             </a:r>
             <a:endParaRPr lang="en-US" sz="1300" dirty="0"/>
           </a:p>
@@ -38137,11 +39696,11 @@
             </a:avLst>
           </a:prstGeom>
           <a:solidFill>
-            <a:srgbClr val="DCFCE7"/>
-          </a:solidFill>
-          <a:ln w="12700">
-            <a:solidFill>
-              <a:srgbClr val="16A34A"/>
+            <a:srgbClr val="FEE2E2"/>
+          </a:solidFill>
+          <a:ln w="12700">
+            <a:solidFill>
+              <a:srgbClr val="DC2626"/>
             </a:solidFill>
             <a:prstDash val="solid"/>
           </a:ln>
@@ -38174,13 +39733,13 @@
             <a:r>
               <a:rPr lang="en-US" sz="1100" b="1" dirty="0">
                 <a:solidFill>
-                  <a:srgbClr val="16A34A"/>
+                  <a:srgbClr val="DC2626"/>
                 </a:solidFill>
                 <a:latin typeface="Trebuchet MS" pitchFamily="34" charset="0"/>
                 <a:ea typeface="Trebuchet MS" pitchFamily="34" charset="-122"/>
                 <a:cs typeface="Trebuchet MS" pitchFamily="34" charset="-120"/>
               </a:rPr>
-              <a:t>TRUE</a:t>
+              <a:t>FALSE</a:t>
             </a:r>
             <a:endParaRPr lang="en-US" sz="1100" dirty="0"/>
           </a:p>
@@ -38253,7 +39812,7 @@
                 <a:ea typeface="Calibri" pitchFamily="34" charset="-122"/>
                 <a:cs typeface="Calibri" pitchFamily="34" charset="-120"/>
               </a:rPr>
-              <a:t>2.  The word 'disrespectful' means to show great admiration for someone.</a:t>
+              <a:t>2.  'Respectful' contains the root 'respect' plus a suffix.</a:t>
             </a:r>
             <a:endParaRPr lang="en-US" sz="1300" dirty="0"/>
           </a:p>
@@ -38276,11 +39835,11 @@
             </a:avLst>
           </a:prstGeom>
           <a:solidFill>
-            <a:srgbClr val="FEE2E2"/>
-          </a:solidFill>
-          <a:ln w="12700">
-            <a:solidFill>
-              <a:srgbClr val="DC2626"/>
+            <a:srgbClr val="DCFCE7"/>
+          </a:solidFill>
+          <a:ln w="12700">
+            <a:solidFill>
+              <a:srgbClr val="16A34A"/>
             </a:solidFill>
             <a:prstDash val="solid"/>
           </a:ln>
@@ -38313,13 +39872,13 @@
             <a:r>
               <a:rPr lang="en-US" sz="1100" b="1" dirty="0">
                 <a:solidFill>
-                  <a:srgbClr val="DC2626"/>
+                  <a:srgbClr val="16A34A"/>
                 </a:solidFill>
                 <a:latin typeface="Trebuchet MS" pitchFamily="34" charset="0"/>
                 <a:ea typeface="Trebuchet MS" pitchFamily="34" charset="-122"/>
                 <a:cs typeface="Trebuchet MS" pitchFamily="34" charset="-120"/>
               </a:rPr>
-              <a:t>FALSE</a:t>
+              <a:t>TRUE</a:t>
             </a:r>
             <a:endParaRPr lang="en-US" sz="1100" dirty="0"/>
           </a:p>
@@ -38392,7 +39951,7 @@
                 <a:ea typeface="Calibri" pitchFamily="34" charset="-122"/>
                 <a:cs typeface="Calibri" pitchFamily="34" charset="-120"/>
               </a:rPr>
-              <a:t>3.  Adding the prefix 'dis-' to 'respect' creates a word with the opposite meaning.</a:t>
+              <a:t>3.  Adding the prefix 'ir' to 'respect' makes a word that means extra respect.</a:t>
             </a:r>
             <a:endParaRPr lang="en-US" sz="1300" dirty="0"/>
           </a:p>
@@ -38415,11 +39974,11 @@
             </a:avLst>
           </a:prstGeom>
           <a:solidFill>
-            <a:srgbClr val="DCFCE7"/>
-          </a:solidFill>
-          <a:ln w="12700">
-            <a:solidFill>
-              <a:srgbClr val="16A34A"/>
+            <a:srgbClr val="FEE2E2"/>
+          </a:solidFill>
+          <a:ln w="12700">
+            <a:solidFill>
+              <a:srgbClr val="DC2626"/>
             </a:solidFill>
             <a:prstDash val="solid"/>
           </a:ln>
@@ -38452,13 +40011,13 @@
             <a:r>
               <a:rPr lang="en-US" sz="1100" b="1" dirty="0">
                 <a:solidFill>
-                  <a:srgbClr val="16A34A"/>
+                  <a:srgbClr val="DC2626"/>
                 </a:solidFill>
                 <a:latin typeface="Trebuchet MS" pitchFamily="34" charset="0"/>
                 <a:ea typeface="Trebuchet MS" pitchFamily="34" charset="-122"/>
                 <a:cs typeface="Trebuchet MS" pitchFamily="34" charset="-120"/>
               </a:rPr>
-              <a:t>TRUE</a:t>
+              <a:t>FALSE</a:t>
             </a:r>
             <a:endParaRPr lang="en-US" sz="1100" dirty="0"/>
           </a:p>
@@ -38531,7 +40090,7 @@
                 <a:ea typeface="Calibri" pitchFamily="34" charset="-122"/>
                 <a:cs typeface="Calibri" pitchFamily="34" charset="-120"/>
               </a:rPr>
-              <a:t>4.  The word 'respectful' contains both the root 'respect' and the suffix '-ful'.</a:t>
+              <a:t>4.  The root 'respect' comes from a Latin word.</a:t>
             </a:r>
             <a:endParaRPr lang="en-US" sz="1300" dirty="0"/>
           </a:p>
@@ -38670,7 +40229,7 @@
                 <a:ea typeface="Calibri" pitchFamily="34" charset="-122"/>
                 <a:cs typeface="Calibri" pitchFamily="34" charset="-120"/>
               </a:rPr>
-              <a:t>5.  The suffix '-less' means full of, so 'respectless' means full of respect.</a:t>
+              <a:t>5.  'Disrespect' means to treat someone without care or regard.</a:t>
             </a:r>
             <a:endParaRPr lang="en-US" sz="1300" dirty="0"/>
           </a:p>
@@ -38693,11 +40252,11 @@
             </a:avLst>
           </a:prstGeom>
           <a:solidFill>
-            <a:srgbClr val="FEE2E2"/>
-          </a:solidFill>
-          <a:ln w="12700">
-            <a:solidFill>
-              <a:srgbClr val="DC2626"/>
+            <a:srgbClr val="DCFCE7"/>
+          </a:solidFill>
+          <a:ln w="12700">
+            <a:solidFill>
+              <a:srgbClr val="16A34A"/>
             </a:solidFill>
             <a:prstDash val="solid"/>
           </a:ln>
@@ -38730,13 +40289,13 @@
             <a:r>
               <a:rPr lang="en-US" sz="1100" b="1" dirty="0">
                 <a:solidFill>
-                  <a:srgbClr val="DC2626"/>
+                  <a:srgbClr val="16A34A"/>
                 </a:solidFill>
                 <a:latin typeface="Trebuchet MS" pitchFamily="34" charset="0"/>
                 <a:ea typeface="Trebuchet MS" pitchFamily="34" charset="-122"/>
                 <a:cs typeface="Trebuchet MS" pitchFamily="34" charset="-120"/>
               </a:rPr>
-              <a:t>FALSE</a:t>
+              <a:t>TRUE</a:t>
             </a:r>
             <a:endParaRPr lang="en-US" sz="1100" dirty="0"/>
           </a:p>
@@ -39507,7 +41066,7 @@
                 <a:ea typeface="Trebuchet MS" pitchFamily="34" charset="-122"/>
                 <a:cs typeface="Trebuchet MS" pitchFamily="34" charset="-120"/>
               </a:rPr>
-              <a:t>irrespective</a:t>
+              <a:t>respectfully</a:t>
             </a:r>
             <a:endParaRPr lang="en-US" sz="1300" dirty="0"/>
           </a:p>
@@ -39573,7 +41132,7 @@
                 <a:ea typeface="Trebuchet MS" pitchFamily="34" charset="-122"/>
                 <a:cs typeface="Trebuchet MS" pitchFamily="34" charset="-120"/>
               </a:rPr>
-              <a:t>respectable</a:t>
+              <a:t>irrespective</a:t>
             </a:r>
             <a:endParaRPr lang="en-US" sz="1300" dirty="0"/>
           </a:p>
@@ -39639,7 +41198,7 @@
                 <a:ea typeface="Trebuchet MS" pitchFamily="34" charset="-122"/>
                 <a:cs typeface="Trebuchet MS" pitchFamily="34" charset="-120"/>
               </a:rPr>
-              <a:t>respectfully</a:t>
+              <a:t>respectable</a:t>
             </a:r>
             <a:endParaRPr lang="en-US" sz="1300" dirty="0"/>
           </a:p>
@@ -40732,7 +42291,7 @@
                 <a:ea typeface="Trebuchet MS" pitchFamily="34" charset="-122"/>
                 <a:cs typeface="Trebuchet MS" pitchFamily="34" charset="-120"/>
               </a:rPr>
-              <a:t>-ing</a:t>
+              <a:t>-ed</a:t>
             </a:r>
             <a:endParaRPr lang="en-US" sz="1300" dirty="0"/>
           </a:p>
@@ -40885,7 +42444,7 @@
                 <a:ea typeface="Trebuchet MS" pitchFamily="34" charset="-122"/>
                 <a:cs typeface="Trebuchet MS" pitchFamily="34" charset="-120"/>
               </a:rPr>
-              <a:t>-ed</a:t>
+              <a:t>-ing</a:t>
             </a:r>
             <a:endParaRPr lang="en-US" sz="1300" dirty="0"/>
           </a:p>
@@ -41949,7 +43508,7 @@
                 <a:ea typeface="Calibri" pitchFamily="34" charset="-122"/>
                 <a:cs typeface="Calibri" pitchFamily="34" charset="-120"/>
               </a:rPr>
-              <a:t>Behaving in a way that is good and worthy of praise.</a:t>
+              <a:t>Not letting something affect a decision; regardless of what happens.</a:t>
             </a:r>
             <a:endParaRPr lang="en-US" sz="1200" dirty="0"/>
           </a:p>
@@ -42088,7 +43647,7 @@
                 <a:ea typeface="Calibri" pitchFamily="34" charset="-122"/>
                 <a:cs typeface="Calibri" pitchFamily="34" charset="-120"/>
               </a:rPr>
-              <a:t>Not letting something affect a decision; regardless.</a:t>
+              <a:t>Doing something in a polite and considerate way.</a:t>
             </a:r>
             <a:endParaRPr lang="en-US" sz="1200" dirty="0"/>
           </a:p>
@@ -42227,7 +43786,7 @@
                 <a:ea typeface="Calibri" pitchFamily="34" charset="-122"/>
                 <a:cs typeface="Calibri" pitchFamily="34" charset="-120"/>
               </a:rPr>
-              <a:t>To treat someone rudely or without care.</a:t>
+              <a:t>Treating someone rudely or without care, as if they don't matter.</a:t>
             </a:r>
             <a:endParaRPr lang="en-US" sz="1200" dirty="0"/>
           </a:p>
@@ -42300,7 +43859,7 @@
                 <a:ea typeface="Trebuchet MS" pitchFamily="34" charset="-122"/>
                 <a:cs typeface="Trebuchet MS" pitchFamily="34" charset="-120"/>
               </a:rPr>
-              <a:t>irrespective</a:t>
+              <a:t>respectfully</a:t>
             </a:r>
             <a:endParaRPr lang="en-US" sz="1200" dirty="0"/>
           </a:p>
@@ -42366,7 +43925,7 @@
                 <a:ea typeface="Calibri" pitchFamily="34" charset="-122"/>
                 <a:cs typeface="Calibri" pitchFamily="34" charset="-120"/>
               </a:rPr>
-              <a:t>Being rude or showing no care for others' feelings.</a:t>
+              <a:t>Being rude or showing that you don't care about someone's feelings.</a:t>
             </a:r>
             <a:endParaRPr lang="en-US" sz="1200" dirty="0"/>
           </a:p>
@@ -42439,7 +43998,7 @@
                 <a:ea typeface="Trebuchet MS" pitchFamily="34" charset="-122"/>
                 <a:cs typeface="Trebuchet MS" pitchFamily="34" charset="-120"/>
               </a:rPr>
-              <a:t>respectable</a:t>
+              <a:t>irrespective</a:t>
             </a:r>
             <a:endParaRPr lang="en-US" sz="1200" dirty="0"/>
           </a:p>
@@ -42505,7 +44064,7 @@
                 <a:ea typeface="Calibri" pitchFamily="34" charset="-122"/>
                 <a:cs typeface="Calibri" pitchFamily="34" charset="-120"/>
               </a:rPr>
-              <a:t>To treat someone or something as important and valuable.</a:t>
+              <a:t>To treat someone or something with care and consideration because they are important.</a:t>
             </a:r>
             <a:endParaRPr lang="en-US" sz="1200" dirty="0"/>
           </a:p>
@@ -42578,7 +44137,7 @@
                 <a:ea typeface="Trebuchet MS" pitchFamily="34" charset="-122"/>
                 <a:cs typeface="Trebuchet MS" pitchFamily="34" charset="-120"/>
               </a:rPr>
-              <a:t>respectfully</a:t>
+              <a:t>respectable</a:t>
             </a:r>
             <a:endParaRPr lang="en-US" sz="1200" dirty="0"/>
           </a:p>
@@ -42644,7 +44203,7 @@
                 <a:ea typeface="Calibri" pitchFamily="34" charset="-122"/>
                 <a:cs typeface="Calibri" pitchFamily="34" charset="-120"/>
               </a:rPr>
-              <a:t>Doing something in a polite and considerate way.</a:t>
+              <a:t>Behaving in a way that other people think is good and proper.</a:t>
             </a:r>
             <a:endParaRPr lang="en-US" sz="1200" dirty="0"/>
           </a:p>
@@ -42783,7 +44342,7 @@
                 <a:ea typeface="Calibri" pitchFamily="34" charset="-122"/>
                 <a:cs typeface="Calibri" pitchFamily="34" charset="-120"/>
               </a:rPr>
-              <a:t>Showing care and politeness towards others.</a:t>
+              <a:t>Showing that you treat others with care and good manners.</a:t>
             </a:r>
             <a:endParaRPr lang="en-US" sz="1200" dirty="0"/>
           </a:p>
@@ -43278,7 +44837,7 @@
                 <a:ea typeface="Calibri" pitchFamily="34" charset="-122"/>
                 <a:cs typeface="Calibri" pitchFamily="34" charset="-120"/>
               </a:rPr>
-              <a:t>We should always be respectful to our teachers and classmates in the classroom.</a:t>
+              <a:t>We show respectful behaviour in class by listening when others are speaking.</a:t>
             </a:r>
             <a:endParaRPr lang="en-US" sz="1500" dirty="0"/>
           </a:p>
@@ -43442,7 +45001,7 @@
                 <a:ea typeface="Calibri" pitchFamily="34" charset="-122"/>
                 <a:cs typeface="Calibri" pitchFamily="34" charset="-120"/>
               </a:rPr>
-              <a:t>It is important to show self-respect by standing up for what you believe is right.</a:t>
+              <a:t>It is important not to disrespect your teammates, even when your team loses a game.</a:t>
             </a:r>
             <a:endParaRPr lang="en-US" sz="1500" dirty="0"/>
           </a:p>
@@ -43606,7 +45165,7 @@
                 <a:ea typeface="Calibri" pitchFamily="34" charset="-122"/>
                 <a:cs typeface="Calibri" pitchFamily="34" charset="-120"/>
               </a:rPr>
-              <a:t>Sadly, the student was sent to the principal after acting in a disrespectful way towards others.</a:t>
+              <a:t>The students were asked to treat the visiting elder respectfully and listen carefully to her story.</a:t>
             </a:r>
             <a:endParaRPr lang="en-US" sz="1500" dirty="0"/>
           </a:p>
